--- a/rad/FocusGuard-prezentacija.pptx
+++ b/rad/FocusGuard-prezentacija.pptx
@@ -3625,8 +3625,8 @@
         </p:nvSpPr>
         <p:spPr>
           <a:xfrm>
-            <a:off x="830770" y="1524000"/>
-            <a:ext cx="3824859" cy="4632960"/>
+            <a:off x="792480" y="1791950"/>
+            <a:ext cx="3261360" cy="3082075"/>
           </a:xfrm>
           <a:prstGeom prst="rect">
             <a:avLst/>
@@ -3665,7 +3665,7 @@
       </p:sp>
       <p:pic>
         <p:nvPicPr>
-          <p:cNvPr id="5" name="Picture 4" descr="ekran-rezultat-ai-0.075.png"/>
+          <p:cNvPr id="5" name="Picture 4" descr="p57-rezultat-ai-0.348-0.328-0.125.png"/>
           <p:cNvPicPr>
             <a:picLocks noChangeAspect="1"/>
           </p:cNvPicPr>
@@ -3679,8 +3679,8 @@
         </p:blipFill>
         <p:spPr>
           <a:xfrm>
-            <a:off x="906970" y="1600200"/>
-            <a:ext cx="3672459" cy="4480560"/>
+            <a:off x="868680" y="1868150"/>
+            <a:ext cx="3108960" cy="2929675"/>
           </a:xfrm>
           <a:prstGeom prst="rect">
             <a:avLst/>
@@ -3689,14 +3689,74 @@
       </p:pic>
       <p:sp>
         <p:nvSpPr>
-          <p:cNvPr id="6" name="Rectangle 5"/>
+          <p:cNvPr id="6" name="TextBox 5"/>
+          <p:cNvSpPr txBox="1"/>
+          <p:nvPr/>
+        </p:nvSpPr>
+        <p:spPr>
+          <a:xfrm>
+            <a:off x="868680" y="5257800"/>
+            <a:ext cx="3108960" cy="1005840"/>
+          </a:xfrm>
+          <a:prstGeom prst="rect">
+            <a:avLst/>
+          </a:prstGeom>
+          <a:noFill/>
+        </p:spPr>
+        <p:txBody>
+          <a:bodyPr wrap="square" lIns="0" rIns="0" tIns="0" bIns="0">
+            <a:spAutoFit/>
+          </a:bodyPr>
+          <a:lstStyle/>
+          <a:p>
+            <a:pPr algn="ctr">
+              <a:spcBef>
+                <a:spcPts val="0"/>
+              </a:spcBef>
+              <a:buNone/>
+            </a:pPr>
+            <a:r>
+              <a:rPr sz="1700" b="1">
+                <a:solidFill>
+                  <a:srgbClr val="FF5500"/>
+                </a:solidFill>
+                <a:latin typeface="Arial"/>
+              </a:rPr>
+              <a:t>оцена</a:t>
+            </a:r>
+          </a:p>
+          <a:p>
+            <a:pPr algn="ctr">
+              <a:lnSpc>
+                <a:spcPct val="110000"/>
+              </a:lnSpc>
+              <a:spcBef>
+                <a:spcPts val="500"/>
+              </a:spcBef>
+              <a:buNone/>
+            </a:pPr>
+            <a:r>
+              <a:rPr sz="1400" b="0">
+                <a:solidFill>
+                  <a:srgbClr val="8E8E93"/>
+                </a:solidFill>
+                <a:latin typeface="Arial"/>
+              </a:rPr>
+              <a:t>оцена се образлаже, а не саопштава</a:t>
+            </a:r>
+          </a:p>
+        </p:txBody>
+      </p:sp>
+      <p:sp>
+        <p:nvSpPr>
+          <p:cNvPr id="7" name="Rectangle 6"/>
           <p:cNvSpPr/>
           <p:nvPr/>
         </p:nvSpPr>
         <p:spPr>
           <a:xfrm>
-            <a:off x="5169330" y="1524000"/>
-            <a:ext cx="2097179" cy="4632960"/>
+            <a:off x="4843134" y="1496568"/>
+            <a:ext cx="2200931" cy="3672840"/>
           </a:xfrm>
           <a:prstGeom prst="rect">
             <a:avLst/>
@@ -3735,7 +3795,7 @@
       </p:sp>
       <p:pic>
         <p:nvPicPr>
-          <p:cNvPr id="7" name="Picture 6" descr="ekran-detalj-uslovi.png"/>
+          <p:cNvPr id="8" name="Picture 7" descr="p57-rezultat-uslovi-0.050-0.370-0.125.png"/>
           <p:cNvPicPr>
             <a:picLocks noChangeAspect="1"/>
           </p:cNvPicPr>
@@ -3749,8 +3809,8 @@
         </p:blipFill>
         <p:spPr>
           <a:xfrm>
-            <a:off x="5245530" y="1600200"/>
-            <a:ext cx="1944779" cy="4480560"/>
+            <a:off x="4919334" y="1572768"/>
+            <a:ext cx="2048531" cy="3520440"/>
           </a:xfrm>
           <a:prstGeom prst="rect">
             <a:avLst/>
@@ -3759,14 +3819,14 @@
       </p:pic>
       <p:sp>
         <p:nvSpPr>
-          <p:cNvPr id="8" name="TextBox 7"/>
+          <p:cNvPr id="9" name="TextBox 8"/>
           <p:cNvSpPr txBox="1"/>
           <p:nvPr/>
         </p:nvSpPr>
         <p:spPr>
           <a:xfrm>
-            <a:off x="7863840" y="1920240"/>
-            <a:ext cx="3657600" cy="4206240"/>
+            <a:off x="4389120" y="5257800"/>
+            <a:ext cx="3108960" cy="1005840"/>
           </a:xfrm>
           <a:prstGeom prst="rect">
             <a:avLst/>
@@ -3779,82 +3839,177 @@
           </a:bodyPr>
           <a:lstStyle/>
           <a:p>
-            <a:pPr marL="279400" indent="-279400">
+            <a:pPr algn="ctr">
+              <a:spcBef>
+                <a:spcPts val="0"/>
+              </a:spcBef>
+              <a:buNone/>
+            </a:pPr>
+            <a:r>
+              <a:rPr sz="1700" b="1">
+                <a:solidFill>
+                  <a:srgbClr val="FF5500"/>
+                </a:solidFill>
+                <a:latin typeface="Arial"/>
+              </a:rPr>
+              <a:t>услови</a:t>
+            </a:r>
+          </a:p>
+          <a:p>
+            <a:pPr algn="ctr">
               <a:lnSpc>
-                <a:spcPct val="105000"/>
+                <a:spcPct val="110000"/>
               </a:lnSpc>
               <a:spcBef>
+                <a:spcPts val="500"/>
+              </a:spcBef>
+              <a:buNone/>
+            </a:pPr>
+            <a:r>
+              <a:rPr sz="1400" b="0">
+                <a:solidFill>
+                  <a:srgbClr val="8E8E93"/>
+                </a:solidFill>
+                <a:latin typeface="Arial"/>
+              </a:rPr>
+              <a:t>свако очитавање стоји уз праг који га је судио</a:t>
+            </a:r>
+          </a:p>
+        </p:txBody>
+      </p:sp>
+      <p:sp>
+        <p:nvSpPr>
+          <p:cNvPr id="10" name="Rectangle 9"/>
+          <p:cNvSpPr/>
+          <p:nvPr/>
+        </p:nvSpPr>
+        <p:spPr>
+          <a:xfrm>
+            <a:off x="8259347" y="1496568"/>
+            <a:ext cx="2409386" cy="3672840"/>
+          </a:xfrm>
+          <a:prstGeom prst="rect">
+            <a:avLst/>
+          </a:prstGeom>
+          <a:solidFill>
+            <a:srgbClr val="18181E"/>
+          </a:solidFill>
+          <a:ln w="9525">
+            <a:solidFill>
+              <a:srgbClr val="2A2A32"/>
+            </a:solidFill>
+          </a:ln>
+          <a:effectLst/>
+        </p:spPr>
+        <p:style>
+          <a:lnRef idx="1">
+            <a:schemeClr val="accent1"/>
+          </a:lnRef>
+          <a:fillRef idx="3">
+            <a:schemeClr val="accent1"/>
+          </a:fillRef>
+          <a:effectRef idx="2">
+            <a:schemeClr val="accent1"/>
+          </a:effectRef>
+          <a:fontRef idx="minor">
+            <a:schemeClr val="lt1"/>
+          </a:fontRef>
+        </p:style>
+        <p:txBody>
+          <a:bodyPr rtlCol="0" anchor="ctr"/>
+          <a:lstStyle/>
+          <a:p>
+            <a:pPr algn="ctr"/>
+          </a:p>
+        </p:txBody>
+      </p:sp>
+      <p:pic>
+        <p:nvPicPr>
+          <p:cNvPr id="11" name="Picture 10" descr="p57-rezultat-prekidi-0.268-0.212-0.125.png"/>
+          <p:cNvPicPr>
+            <a:picLocks noChangeAspect="1"/>
+          </p:cNvPicPr>
+          <p:nvPr/>
+        </p:nvPicPr>
+        <p:blipFill>
+          <a:blip r:embed="rId4"/>
+          <a:stretch>
+            <a:fillRect/>
+          </a:stretch>
+        </p:blipFill>
+        <p:spPr>
+          <a:xfrm>
+            <a:off x="8335547" y="1572768"/>
+            <a:ext cx="2256986" cy="3520440"/>
+          </a:xfrm>
+          <a:prstGeom prst="rect">
+            <a:avLst/>
+          </a:prstGeom>
+        </p:spPr>
+      </p:pic>
+      <p:sp>
+        <p:nvSpPr>
+          <p:cNvPr id="12" name="TextBox 11"/>
+          <p:cNvSpPr txBox="1"/>
+          <p:nvPr/>
+        </p:nvSpPr>
+        <p:spPr>
+          <a:xfrm>
+            <a:off x="7909560" y="5257800"/>
+            <a:ext cx="3108960" cy="1005840"/>
+          </a:xfrm>
+          <a:prstGeom prst="rect">
+            <a:avLst/>
+          </a:prstGeom>
+          <a:noFill/>
+        </p:spPr>
+        <p:txBody>
+          <a:bodyPr wrap="square" lIns="0" rIns="0" tIns="0" bIns="0">
+            <a:spAutoFit/>
+          </a:bodyPr>
+          <a:lstStyle/>
+          <a:p>
+            <a:pPr algn="ctr">
+              <a:spcBef>
                 <a:spcPts val="0"/>
               </a:spcBef>
-              <a:buClr>
-                <a:srgbClr val="FF5500"/>
-              </a:buClr>
-              <a:buFont typeface="Arial"/>
-              <a:buChar char="▪"/>
-            </a:pPr>
-            <a:r>
-              <a:rPr sz="1600" b="0">
-                <a:solidFill>
-                  <a:srgbClr val="F2F2F7"/>
-                </a:solidFill>
-                <a:latin typeface="Arial"/>
-              </a:rPr>
-              <a:t>Три картице: оцена, услови и прекиди</a:t>
-            </a:r>
-          </a:p>
-          <a:p>
-            <a:pPr marL="279400" indent="-279400">
+              <a:buNone/>
+            </a:pPr>
+            <a:r>
+              <a:rPr sz="1700" b="1">
+                <a:solidFill>
+                  <a:srgbClr val="FF5500"/>
+                </a:solidFill>
+                <a:latin typeface="Arial"/>
+              </a:rPr>
+              <a:t>прекиди</a:t>
+            </a:r>
+          </a:p>
+          <a:p>
+            <a:pPr algn="ctr">
               <a:lnSpc>
-                <a:spcPct val="105000"/>
+                <a:spcPct val="110000"/>
               </a:lnSpc>
               <a:spcBef>
-                <a:spcPts val="1300"/>
-              </a:spcBef>
-              <a:buClr>
-                <a:srgbClr val="FF5500"/>
-              </a:buClr>
-              <a:buFont typeface="Arial"/>
-              <a:buChar char="▪"/>
-            </a:pPr>
-            <a:r>
-              <a:rPr sz="1600" b="0">
-                <a:solidFill>
-                  <a:srgbClr val="F2F2F7"/>
-                </a:solidFill>
-                <a:latin typeface="Arial"/>
-              </a:rPr>
-              <a:t>Оцена се образлаже, а не саопштава</a:t>
-            </a:r>
-          </a:p>
-          <a:p>
-            <a:pPr marL="279400" indent="-279400">
-              <a:lnSpc>
-                <a:spcPct val="105000"/>
-              </a:lnSpc>
-              <a:spcBef>
-                <a:spcPts val="1300"/>
-              </a:spcBef>
-              <a:buClr>
-                <a:srgbClr val="FF5500"/>
-              </a:buClr>
-              <a:buFont typeface="Arial"/>
-              <a:buChar char="▪"/>
-            </a:pPr>
-            <a:r>
-              <a:rPr sz="1600" b="0">
-                <a:solidFill>
-                  <a:srgbClr val="F2F2F7"/>
-                </a:solidFill>
-                <a:latin typeface="Arial"/>
-              </a:rPr>
-              <a:t>Услови се приказују уз праг, па је оцена проверљива</a:t>
-            </a:r>
-          </a:p>
-        </p:txBody>
-      </p:sp>
-      <p:sp>
-        <p:nvSpPr>
-          <p:cNvPr id="9" name="TextBox 8"/>
+                <a:spcPts val="500"/>
+              </a:spcBef>
+              <a:buNone/>
+            </a:pPr>
+            <a:r>
+              <a:rPr sz="1400" b="0">
+                <a:solidFill>
+                  <a:srgbClr val="8E8E93"/>
+                </a:solidFill>
+                <a:latin typeface="Arial"/>
+              </a:rPr>
+              <a:t>броје се и именују, али никад не улазе у оцену</a:t>
+            </a:r>
+          </a:p>
+        </p:txBody>
+      </p:sp>
+      <p:sp>
+        <p:nvSpPr>
+          <p:cNvPr id="13" name="TextBox 12"/>
           <p:cNvSpPr txBox="1"/>
           <p:nvPr/>
         </p:nvSpPr>
@@ -4157,7 +4312,7 @@
                 </a:solidFill>
                 <a:latin typeface="Arial"/>
               </a:rPr>
-              <a:t>AlarmManager, не WorkManager</a:t>
+              <a:t>Тачан аларм, а не одложив посао</a:t>
             </a:r>
           </a:p>
           <a:p>
@@ -4181,7 +4336,7 @@
                 </a:solidFill>
                 <a:latin typeface="Arial"/>
               </a:rPr>
-              <a:t>одложено подсећање изгубило би смисао</a:t>
+              <a:t>AlarmManager, јер WorkManager систем сме да одложи и за двадесет минута</a:t>
             </a:r>
           </a:p>
           <a:p>
@@ -4205,7 +4360,31 @@
                 </a:solidFill>
                 <a:latin typeface="Arial"/>
               </a:rPr>
-              <a:t>Подсетници се обнављају после поновног покретања уређаја</a:t>
+              <a:t>Подсетници се поново заказују после рестарта телефона</a:t>
+            </a:r>
+          </a:p>
+          <a:p>
+            <a:pPr marL="533400" indent="-279400">
+              <a:lnSpc>
+                <a:spcPct val="105000"/>
+              </a:lnSpc>
+              <a:spcBef>
+                <a:spcPts val="500"/>
+              </a:spcBef>
+              <a:buClr>
+                <a:srgbClr val="48484A"/>
+              </a:buClr>
+              <a:buFont typeface="Arial"/>
+              <a:buChar char="–"/>
+            </a:pPr>
+            <a:r>
+              <a:rPr sz="1500" b="0">
+                <a:solidFill>
+                  <a:srgbClr val="8E8E93"/>
+                </a:solidFill>
+                <a:latin typeface="Arial"/>
+              </a:rPr>
+              <a:t>систем при гашењу брише све заказане аларме</a:t>
             </a:r>
           </a:p>
         </p:txBody>
@@ -4258,7 +4437,7 @@
       </p:sp>
       <p:pic>
         <p:nvPicPr>
-          <p:cNvPr id="6" name="Picture 5" descr="p58-zakazana-detalj.png"/>
+          <p:cNvPr id="6" name="Picture 5" descr="p58-zakazana-detalj-0.045-0.030-0.000.png"/>
           <p:cNvPicPr>
             <a:picLocks noChangeAspect="1"/>
           </p:cNvPicPr>
@@ -4495,7 +4674,7 @@
       </p:sp>
       <p:pic>
         <p:nvPicPr>
-          <p:cNvPr id="5" name="Picture 4" descr="p59-istorija-sve.png"/>
+          <p:cNvPr id="5" name="Picture 4" descr="p59-istorija-sve-0.045-0.030-0.000.png"/>
           <p:cNvPicPr>
             <a:picLocks noChangeAspect="1"/>
           </p:cNvPicPr>
@@ -4857,8 +5036,8 @@
         </p:nvSpPr>
         <p:spPr>
           <a:xfrm>
-            <a:off x="685800" y="1691640"/>
-            <a:ext cx="2286000" cy="1600200"/>
+            <a:off x="685800" y="1783080"/>
+            <a:ext cx="2587752" cy="3063240"/>
           </a:xfrm>
           <a:prstGeom prst="rect">
             <a:avLst/>
@@ -4897,14 +5076,60 @@
       </p:sp>
       <p:sp>
         <p:nvSpPr>
-          <p:cNvPr id="5" name="TextBox 4"/>
+          <p:cNvPr id="5" name="Rectangle 4"/>
+          <p:cNvSpPr/>
+          <p:nvPr/>
+        </p:nvSpPr>
+        <p:spPr>
+          <a:xfrm>
+            <a:off x="685800" y="1783080"/>
+            <a:ext cx="2587752" cy="402336"/>
+          </a:xfrm>
+          <a:prstGeom prst="rect">
+            <a:avLst/>
+          </a:prstGeom>
+          <a:solidFill>
+            <a:srgbClr val="202028"/>
+          </a:solidFill>
+          <a:ln w="9525">
+            <a:solidFill>
+              <a:srgbClr val="2A2A32"/>
+            </a:solidFill>
+          </a:ln>
+          <a:effectLst/>
+        </p:spPr>
+        <p:style>
+          <a:lnRef idx="1">
+            <a:schemeClr val="accent1"/>
+          </a:lnRef>
+          <a:fillRef idx="3">
+            <a:schemeClr val="accent1"/>
+          </a:fillRef>
+          <a:effectRef idx="2">
+            <a:schemeClr val="accent1"/>
+          </a:effectRef>
+          <a:fontRef idx="minor">
+            <a:schemeClr val="lt1"/>
+          </a:fontRef>
+        </p:style>
+        <p:txBody>
+          <a:bodyPr rtlCol="0" anchor="ctr"/>
+          <a:lstStyle/>
+          <a:p>
+            <a:pPr algn="ctr"/>
+          </a:p>
+        </p:txBody>
+      </p:sp>
+      <p:sp>
+        <p:nvSpPr>
+          <p:cNvPr id="6" name="TextBox 5"/>
           <p:cNvSpPr txBox="1"/>
           <p:nvPr/>
         </p:nvSpPr>
         <p:spPr>
           <a:xfrm>
-            <a:off x="685800" y="1874519"/>
-            <a:ext cx="2286000" cy="1371600"/>
+            <a:off x="850392" y="1892808"/>
+            <a:ext cx="2258568" cy="274320"/>
           </a:xfrm>
           <a:prstGeom prst="rect">
             <a:avLst/>
@@ -4917,68 +5142,169 @@
           </a:bodyPr>
           <a:lstStyle/>
           <a:p>
-            <a:pPr algn="ctr">
+            <a:pPr>
               <a:spcBef>
                 <a:spcPts val="0"/>
               </a:spcBef>
               <a:buNone/>
             </a:pPr>
             <a:r>
-              <a:rPr sz="4000" b="1">
+              <a:rPr sz="1300" b="1">
                 <a:solidFill>
                   <a:srgbClr val="FF5500"/>
                 </a:solidFill>
                 <a:latin typeface="Arial"/>
               </a:rPr>
-              <a:t>170</a:t>
-            </a:r>
-          </a:p>
-          <a:p>
-            <a:pPr algn="ctr">
-              <a:spcBef>
-                <a:spcPts val="100"/>
-              </a:spcBef>
-              <a:buNone/>
-            </a:pPr>
-            <a:r>
-              <a:rPr sz="1300" b="0">
-                <a:solidFill>
-                  <a:srgbClr val="8E8E93"/>
-                </a:solidFill>
-                <a:latin typeface="Arial"/>
-              </a:rPr>
-              <a:t>јединичних</a:t>
-            </a:r>
-          </a:p>
-          <a:p>
-            <a:pPr algn="ctr">
-              <a:spcBef>
-                <a:spcPts val="100"/>
-              </a:spcBef>
-              <a:buNone/>
-            </a:pPr>
-            <a:r>
-              <a:rPr sz="1300" b="0">
-                <a:solidFill>
-                  <a:srgbClr val="8E8E93"/>
-                </a:solidFill>
-                <a:latin typeface="Arial"/>
-              </a:rPr>
-              <a:t>тестова</a:t>
-            </a:r>
-          </a:p>
-        </p:txBody>
-      </p:sp>
-      <p:sp>
-        <p:nvSpPr>
-          <p:cNvPr id="6" name="Rectangle 5"/>
+              <a:t>Логика</a:t>
+            </a:r>
+          </a:p>
+        </p:txBody>
+      </p:sp>
+      <p:sp>
+        <p:nvSpPr>
+          <p:cNvPr id="7" name="TextBox 6"/>
+          <p:cNvSpPr txBox="1"/>
+          <p:nvPr/>
+        </p:nvSpPr>
+        <p:spPr>
+          <a:xfrm>
+            <a:off x="850392" y="2350008"/>
+            <a:ext cx="2258568" cy="2377440"/>
+          </a:xfrm>
+          <a:prstGeom prst="rect">
+            <a:avLst/>
+          </a:prstGeom>
+          <a:noFill/>
+        </p:spPr>
+        <p:txBody>
+          <a:bodyPr wrap="square" lIns="0" rIns="0" tIns="0" bIns="0">
+            <a:spAutoFit/>
+          </a:bodyPr>
+          <a:lstStyle/>
+          <a:p>
+            <a:pPr marL="279400" indent="-279400">
+              <a:lnSpc>
+                <a:spcPct val="105000"/>
+              </a:lnSpc>
+              <a:spcBef>
+                <a:spcPts val="0"/>
+              </a:spcBef>
+              <a:buClr>
+                <a:srgbClr val="FF5500"/>
+              </a:buClr>
+              <a:buFont typeface="Arial"/>
+              <a:buChar char="▪"/>
+            </a:pPr>
+            <a:r>
+              <a:rPr sz="1200" b="0">
+                <a:solidFill>
+                  <a:srgbClr val="F2F2F7"/>
+                </a:solidFill>
+                <a:latin typeface="Arial"/>
+              </a:rPr>
+              <a:t>мерило оцењивања и распоред пауза</a:t>
+            </a:r>
+          </a:p>
+          <a:p>
+            <a:pPr marL="279400" indent="-279400">
+              <a:lnSpc>
+                <a:spcPct val="105000"/>
+              </a:lnSpc>
+              <a:spcBef>
+                <a:spcPts val="1100"/>
+              </a:spcBef>
+              <a:buClr>
+                <a:srgbClr val="FF5500"/>
+              </a:buClr>
+              <a:buFont typeface="Arial"/>
+              <a:buChar char="▪"/>
+            </a:pPr>
+            <a:r>
+              <a:rPr sz="1200" b="0">
+                <a:solidFill>
+                  <a:srgbClr val="F2F2F7"/>
+                </a:solidFill>
+                <a:latin typeface="Arial"/>
+              </a:rPr>
+              <a:t>преклапања термина и прагови упозорења</a:t>
+            </a:r>
+          </a:p>
+          <a:p>
+            <a:pPr marL="279400" indent="-279400">
+              <a:lnSpc>
+                <a:spcPct val="105000"/>
+              </a:lnSpc>
+              <a:spcBef>
+                <a:spcPts val="1100"/>
+              </a:spcBef>
+              <a:buClr>
+                <a:srgbClr val="FF5500"/>
+              </a:buClr>
+              <a:buFont typeface="Arial"/>
+              <a:buChar char="▪"/>
+            </a:pPr>
+            <a:r>
+              <a:rPr sz="1200" b="0">
+                <a:solidFill>
+                  <a:srgbClr val="F2F2F7"/>
+                </a:solidFill>
+                <a:latin typeface="Arial"/>
+              </a:rPr>
+              <a:t>не тражи уређај</a:t>
+            </a:r>
+          </a:p>
+        </p:txBody>
+      </p:sp>
+      <p:sp>
+        <p:nvSpPr>
+          <p:cNvPr id="8" name="TextBox 7"/>
+          <p:cNvSpPr txBox="1"/>
+          <p:nvPr/>
+        </p:nvSpPr>
+        <p:spPr>
+          <a:xfrm>
+            <a:off x="850392" y="4279392"/>
+            <a:ext cx="2258568" cy="457200"/>
+          </a:xfrm>
+          <a:prstGeom prst="rect">
+            <a:avLst/>
+          </a:prstGeom>
+          <a:noFill/>
+        </p:spPr>
+        <p:txBody>
+          <a:bodyPr wrap="square" lIns="0" rIns="0" tIns="0" bIns="0">
+            <a:spAutoFit/>
+          </a:bodyPr>
+          <a:lstStyle/>
+          <a:p>
+            <a:pPr>
+              <a:spcBef>
+                <a:spcPts val="0"/>
+              </a:spcBef>
+              <a:buNone/>
+            </a:pPr>
+            <a:r>
+              <a:rPr sz="1300" b="1">
+                <a:solidFill>
+                  <a:srgbClr val="FF5500"/>
+                </a:solidFill>
+                <a:latin typeface="Arial"/>
+              </a:rPr>
+              <a:t>170 јединичних тестова</a:t>
+            </a:r>
+          </a:p>
+        </p:txBody>
+      </p:sp>
+      <p:sp>
+        <p:nvSpPr>
+          <p:cNvPr id="9" name="Rectangle 8"/>
           <p:cNvSpPr/>
           <p:nvPr/>
         </p:nvSpPr>
         <p:spPr>
           <a:xfrm>
-            <a:off x="3154680" y="1691640"/>
-            <a:ext cx="2286000" cy="1600200"/>
+            <a:off x="3429000" y="1783080"/>
+            <a:ext cx="2587752" cy="3063240"/>
           </a:xfrm>
           <a:prstGeom prst="rect">
             <a:avLst/>
@@ -5017,14 +5343,60 @@
       </p:sp>
       <p:sp>
         <p:nvSpPr>
-          <p:cNvPr id="7" name="TextBox 6"/>
+          <p:cNvPr id="10" name="Rectangle 9"/>
+          <p:cNvSpPr/>
+          <p:nvPr/>
+        </p:nvSpPr>
+        <p:spPr>
+          <a:xfrm>
+            <a:off x="3429000" y="1783080"/>
+            <a:ext cx="2587752" cy="402336"/>
+          </a:xfrm>
+          <a:prstGeom prst="rect">
+            <a:avLst/>
+          </a:prstGeom>
+          <a:solidFill>
+            <a:srgbClr val="202028"/>
+          </a:solidFill>
+          <a:ln w="9525">
+            <a:solidFill>
+              <a:srgbClr val="2A2A32"/>
+            </a:solidFill>
+          </a:ln>
+          <a:effectLst/>
+        </p:spPr>
+        <p:style>
+          <a:lnRef idx="1">
+            <a:schemeClr val="accent1"/>
+          </a:lnRef>
+          <a:fillRef idx="3">
+            <a:schemeClr val="accent1"/>
+          </a:fillRef>
+          <a:effectRef idx="2">
+            <a:schemeClr val="accent1"/>
+          </a:effectRef>
+          <a:fontRef idx="minor">
+            <a:schemeClr val="lt1"/>
+          </a:fontRef>
+        </p:style>
+        <p:txBody>
+          <a:bodyPr rtlCol="0" anchor="ctr"/>
+          <a:lstStyle/>
+          <a:p>
+            <a:pPr algn="ctr"/>
+          </a:p>
+        </p:txBody>
+      </p:sp>
+      <p:sp>
+        <p:nvSpPr>
+          <p:cNvPr id="11" name="TextBox 10"/>
           <p:cNvSpPr txBox="1"/>
           <p:nvPr/>
         </p:nvSpPr>
         <p:spPr>
           <a:xfrm>
-            <a:off x="3154680" y="1874519"/>
-            <a:ext cx="2286000" cy="1371600"/>
+            <a:off x="3593592" y="1892808"/>
+            <a:ext cx="2258568" cy="274320"/>
           </a:xfrm>
           <a:prstGeom prst="rect">
             <a:avLst/>
@@ -5037,68 +5409,169 @@
           </a:bodyPr>
           <a:lstStyle/>
           <a:p>
-            <a:pPr algn="ctr">
+            <a:pPr>
               <a:spcBef>
                 <a:spcPts val="0"/>
               </a:spcBef>
               <a:buNone/>
             </a:pPr>
             <a:r>
-              <a:rPr sz="4000" b="1">
+              <a:rPr sz="1300" b="1">
                 <a:solidFill>
                   <a:srgbClr val="FF5500"/>
                 </a:solidFill>
                 <a:latin typeface="Arial"/>
               </a:rPr>
-              <a:t>8</a:t>
-            </a:r>
-          </a:p>
-          <a:p>
-            <a:pPr algn="ctr">
-              <a:spcBef>
-                <a:spcPts val="100"/>
-              </a:spcBef>
-              <a:buNone/>
-            </a:pPr>
-            <a:r>
-              <a:rPr sz="1300" b="0">
-                <a:solidFill>
-                  <a:srgbClr val="8E8E93"/>
-                </a:solidFill>
-                <a:latin typeface="Arial"/>
-              </a:rPr>
-              <a:t>инструментисаних</a:t>
-            </a:r>
-          </a:p>
-          <a:p>
-            <a:pPr algn="ctr">
-              <a:spcBef>
-                <a:spcPts val="100"/>
-              </a:spcBef>
-              <a:buNone/>
-            </a:pPr>
-            <a:r>
-              <a:rPr sz="1300" b="0">
-                <a:solidFill>
-                  <a:srgbClr val="8E8E93"/>
-                </a:solidFill>
-                <a:latin typeface="Arial"/>
-              </a:rPr>
-              <a:t>тестова</a:t>
-            </a:r>
-          </a:p>
-        </p:txBody>
-      </p:sp>
-      <p:sp>
-        <p:nvSpPr>
-          <p:cNvPr id="8" name="Rectangle 7"/>
+              <a:t>База</a:t>
+            </a:r>
+          </a:p>
+        </p:txBody>
+      </p:sp>
+      <p:sp>
+        <p:nvSpPr>
+          <p:cNvPr id="12" name="TextBox 11"/>
+          <p:cNvSpPr txBox="1"/>
+          <p:nvPr/>
+        </p:nvSpPr>
+        <p:spPr>
+          <a:xfrm>
+            <a:off x="3593592" y="2350008"/>
+            <a:ext cx="2258568" cy="2377440"/>
+          </a:xfrm>
+          <a:prstGeom prst="rect">
+            <a:avLst/>
+          </a:prstGeom>
+          <a:noFill/>
+        </p:spPr>
+        <p:txBody>
+          <a:bodyPr wrap="square" lIns="0" rIns="0" tIns="0" bIns="0">
+            <a:spAutoFit/>
+          </a:bodyPr>
+          <a:lstStyle/>
+          <a:p>
+            <a:pPr marL="279400" indent="-279400">
+              <a:lnSpc>
+                <a:spcPct val="105000"/>
+              </a:lnSpc>
+              <a:spcBef>
+                <a:spcPts val="0"/>
+              </a:spcBef>
+              <a:buClr>
+                <a:srgbClr val="FF5500"/>
+              </a:buClr>
+              <a:buFont typeface="Arial"/>
+              <a:buChar char="▪"/>
+            </a:pPr>
+            <a:r>
+              <a:rPr sz="1200" b="0">
+                <a:solidFill>
+                  <a:srgbClr val="F2F2F7"/>
+                </a:solidFill>
+                <a:latin typeface="Arial"/>
+              </a:rPr>
+              <a:t>уписи, измене и каскадна брисања</a:t>
+            </a:r>
+          </a:p>
+          <a:p>
+            <a:pPr marL="279400" indent="-279400">
+              <a:lnSpc>
+                <a:spcPct val="105000"/>
+              </a:lnSpc>
+              <a:spcBef>
+                <a:spcPts val="1100"/>
+              </a:spcBef>
+              <a:buClr>
+                <a:srgbClr val="FF5500"/>
+              </a:buClr>
+              <a:buFont typeface="Arial"/>
+              <a:buChar char="▪"/>
+            </a:pPr>
+            <a:r>
+              <a:rPr sz="1200" b="0">
+                <a:solidFill>
+                  <a:srgbClr val="F2F2F7"/>
+                </a:solidFill>
+                <a:latin typeface="Arial"/>
+              </a:rPr>
+              <a:t>прелази између верзија базе</a:t>
+            </a:r>
+          </a:p>
+          <a:p>
+            <a:pPr marL="279400" indent="-279400">
+              <a:lnSpc>
+                <a:spcPct val="105000"/>
+              </a:lnSpc>
+              <a:spcBef>
+                <a:spcPts val="1100"/>
+              </a:spcBef>
+              <a:buClr>
+                <a:srgbClr val="FF5500"/>
+              </a:buClr>
+              <a:buFont typeface="Arial"/>
+              <a:buChar char="▪"/>
+            </a:pPr>
+            <a:r>
+              <a:rPr sz="1200" b="0">
+                <a:solidFill>
+                  <a:srgbClr val="F2F2F7"/>
+                </a:solidFill>
+                <a:latin typeface="Arial"/>
+              </a:rPr>
+              <a:t>извршава се на уређају</a:t>
+            </a:r>
+          </a:p>
+        </p:txBody>
+      </p:sp>
+      <p:sp>
+        <p:nvSpPr>
+          <p:cNvPr id="13" name="TextBox 12"/>
+          <p:cNvSpPr txBox="1"/>
+          <p:nvPr/>
+        </p:nvSpPr>
+        <p:spPr>
+          <a:xfrm>
+            <a:off x="3593592" y="4279392"/>
+            <a:ext cx="2258568" cy="457200"/>
+          </a:xfrm>
+          <a:prstGeom prst="rect">
+            <a:avLst/>
+          </a:prstGeom>
+          <a:noFill/>
+        </p:spPr>
+        <p:txBody>
+          <a:bodyPr wrap="square" lIns="0" rIns="0" tIns="0" bIns="0">
+            <a:spAutoFit/>
+          </a:bodyPr>
+          <a:lstStyle/>
+          <a:p>
+            <a:pPr>
+              <a:spcBef>
+                <a:spcPts val="0"/>
+              </a:spcBef>
+              <a:buNone/>
+            </a:pPr>
+            <a:r>
+              <a:rPr sz="1300" b="1">
+                <a:solidFill>
+                  <a:srgbClr val="FF5500"/>
+                </a:solidFill>
+                <a:latin typeface="Arial"/>
+              </a:rPr>
+              <a:t>8 инструментисаних тестова</a:t>
+            </a:r>
+          </a:p>
+        </p:txBody>
+      </p:sp>
+      <p:sp>
+        <p:nvSpPr>
+          <p:cNvPr id="14" name="Rectangle 13"/>
           <p:cNvSpPr/>
           <p:nvPr/>
         </p:nvSpPr>
         <p:spPr>
           <a:xfrm>
-            <a:off x="5623560" y="1691640"/>
-            <a:ext cx="2286000" cy="1600200"/>
+            <a:off x="6172200" y="1783080"/>
+            <a:ext cx="2587752" cy="3063240"/>
           </a:xfrm>
           <a:prstGeom prst="rect">
             <a:avLst/>
@@ -5137,14 +5610,60 @@
       </p:sp>
       <p:sp>
         <p:nvSpPr>
-          <p:cNvPr id="9" name="TextBox 8"/>
+          <p:cNvPr id="15" name="Rectangle 14"/>
+          <p:cNvSpPr/>
+          <p:nvPr/>
+        </p:nvSpPr>
+        <p:spPr>
+          <a:xfrm>
+            <a:off x="6172200" y="1783080"/>
+            <a:ext cx="2587752" cy="402336"/>
+          </a:xfrm>
+          <a:prstGeom prst="rect">
+            <a:avLst/>
+          </a:prstGeom>
+          <a:solidFill>
+            <a:srgbClr val="202028"/>
+          </a:solidFill>
+          <a:ln w="9525">
+            <a:solidFill>
+              <a:srgbClr val="2A2A32"/>
+            </a:solidFill>
+          </a:ln>
+          <a:effectLst/>
+        </p:spPr>
+        <p:style>
+          <a:lnRef idx="1">
+            <a:schemeClr val="accent1"/>
+          </a:lnRef>
+          <a:fillRef idx="3">
+            <a:schemeClr val="accent1"/>
+          </a:fillRef>
+          <a:effectRef idx="2">
+            <a:schemeClr val="accent1"/>
+          </a:effectRef>
+          <a:fontRef idx="minor">
+            <a:schemeClr val="lt1"/>
+          </a:fontRef>
+        </p:style>
+        <p:txBody>
+          <a:bodyPr rtlCol="0" anchor="ctr"/>
+          <a:lstStyle/>
+          <a:p>
+            <a:pPr algn="ctr"/>
+          </a:p>
+        </p:txBody>
+      </p:sp>
+      <p:sp>
+        <p:nvSpPr>
+          <p:cNvPr id="16" name="TextBox 15"/>
           <p:cNvSpPr txBox="1"/>
           <p:nvPr/>
         </p:nvSpPr>
         <p:spPr>
           <a:xfrm>
-            <a:off x="5623560" y="1874519"/>
-            <a:ext cx="2286000" cy="1371600"/>
+            <a:off x="6336792" y="1892808"/>
+            <a:ext cx="2258568" cy="274320"/>
           </a:xfrm>
           <a:prstGeom prst="rect">
             <a:avLst/>
@@ -5157,68 +5676,34 @@
           </a:bodyPr>
           <a:lstStyle/>
           <a:p>
-            <a:pPr algn="ctr">
+            <a:pPr>
               <a:spcBef>
                 <a:spcPts val="0"/>
               </a:spcBef>
               <a:buNone/>
             </a:pPr>
             <a:r>
-              <a:rPr sz="4000" b="1">
+              <a:rPr sz="1300" b="1">
                 <a:solidFill>
                   <a:srgbClr val="FF5500"/>
                 </a:solidFill>
                 <a:latin typeface="Arial"/>
               </a:rPr>
-              <a:t>10</a:t>
-            </a:r>
-          </a:p>
-          <a:p>
-            <a:pPr algn="ctr">
-              <a:spcBef>
-                <a:spcPts val="100"/>
-              </a:spcBef>
-              <a:buNone/>
-            </a:pPr>
-            <a:r>
-              <a:rPr sz="1300" b="0">
-                <a:solidFill>
-                  <a:srgbClr val="8E8E93"/>
-                </a:solidFill>
-                <a:latin typeface="Arial"/>
-              </a:rPr>
-              <a:t>корисника у</a:t>
-            </a:r>
-          </a:p>
-          <a:p>
-            <a:pPr algn="ctr">
-              <a:spcBef>
-                <a:spcPts val="100"/>
-              </a:spcBef>
-              <a:buNone/>
-            </a:pPr>
-            <a:r>
-              <a:rPr sz="1300" b="0">
-                <a:solidFill>
-                  <a:srgbClr val="8E8E93"/>
-                </a:solidFill>
-                <a:latin typeface="Arial"/>
-              </a:rPr>
-              <a:t>другом кругу</a:t>
-            </a:r>
-          </a:p>
-        </p:txBody>
-      </p:sp>
-      <p:sp>
-        <p:nvSpPr>
-          <p:cNvPr id="10" name="TextBox 9"/>
+              <a:t>Сензори</a:t>
+            </a:r>
+          </a:p>
+        </p:txBody>
+      </p:sp>
+      <p:sp>
+        <p:nvSpPr>
+          <p:cNvPr id="17" name="TextBox 16"/>
           <p:cNvSpPr txBox="1"/>
           <p:nvPr/>
         </p:nvSpPr>
         <p:spPr>
           <a:xfrm>
-            <a:off x="685800" y="3657600"/>
-            <a:ext cx="10789920" cy="2743200"/>
+            <a:off x="6336792" y="2350008"/>
+            <a:ext cx="2258568" cy="2377440"/>
           </a:xfrm>
           <a:prstGeom prst="rect">
             <a:avLst/>
@@ -5245,37 +5730,13 @@
               <a:buChar char="▪"/>
             </a:pPr>
             <a:r>
-              <a:rPr sz="1700" b="0">
+              <a:rPr sz="1200" b="0">
                 <a:solidFill>
                   <a:srgbClr val="F2F2F7"/>
                 </a:solidFill>
                 <a:latin typeface="Arial"/>
               </a:rPr>
-              <a:t>Логика независна од уређаја покривена је јединичним тестовима</a:t>
-            </a:r>
-          </a:p>
-          <a:p>
-            <a:pPr marL="533400" indent="-279400">
-              <a:lnSpc>
-                <a:spcPct val="105000"/>
-              </a:lnSpc>
-              <a:spcBef>
-                <a:spcPts val="500"/>
-              </a:spcBef>
-              <a:buClr>
-                <a:srgbClr val="48484A"/>
-              </a:buClr>
-              <a:buFont typeface="Arial"/>
-              <a:buChar char="–"/>
-            </a:pPr>
-            <a:r>
-              <a:rPr sz="1300" b="0">
-                <a:solidFill>
-                  <a:srgbClr val="8E8E93"/>
-                </a:solidFill>
-                <a:latin typeface="Arial"/>
-              </a:rPr>
-              <a:t>мерило оцењивања, распоред пауза, преклапања, праг упозорења</a:t>
+              <a:t>вредности се убацују у емулатор</a:t>
             </a:r>
           </a:p>
           <a:p>
@@ -5284,7 +5745,7 @@
                 <a:spcPct val="105000"/>
               </a:lnSpc>
               <a:spcBef>
-                <a:spcPts val="1300"/>
+                <a:spcPts val="1100"/>
               </a:spcBef>
               <a:buClr>
                 <a:srgbClr val="FF5500"/>
@@ -5293,37 +5754,13 @@
               <a:buChar char="▪"/>
             </a:pPr>
             <a:r>
-              <a:rPr sz="1700" b="0">
+              <a:rPr sz="1200" b="0">
                 <a:solidFill>
                   <a:srgbClr val="F2F2F7"/>
                 </a:solidFill>
                 <a:latin typeface="Arial"/>
               </a:rPr>
-              <a:t>База је проверена инструментисаним тестовима</a:t>
-            </a:r>
-          </a:p>
-          <a:p>
-            <a:pPr marL="533400" indent="-279400">
-              <a:lnSpc>
-                <a:spcPct val="105000"/>
-              </a:lnSpc>
-              <a:spcBef>
-                <a:spcPts val="500"/>
-              </a:spcBef>
-              <a:buClr>
-                <a:srgbClr val="48484A"/>
-              </a:buClr>
-              <a:buFont typeface="Arial"/>
-              <a:buChar char="–"/>
-            </a:pPr>
-            <a:r>
-              <a:rPr sz="1300" b="0">
-                <a:solidFill>
-                  <a:srgbClr val="8E8E93"/>
-                </a:solidFill>
-                <a:latin typeface="Arial"/>
-              </a:rPr>
-              <a:t>укључујући прелазе између верзија</a:t>
+              <a:t>проверено свих шест упозорења</a:t>
             </a:r>
           </a:p>
           <a:p>
@@ -5332,7 +5769,7 @@
                 <a:spcPct val="105000"/>
               </a:lnSpc>
               <a:spcBef>
-                <a:spcPts val="1300"/>
+                <a:spcPts val="1100"/>
               </a:spcBef>
               <a:buClr>
                 <a:srgbClr val="FF5500"/>
@@ -5341,46 +5778,217 @@
               <a:buChar char="▪"/>
             </a:pPr>
             <a:r>
-              <a:rPr sz="1700" b="0">
+              <a:rPr sz="1200" b="0">
                 <a:solidFill>
                   <a:srgbClr val="F2F2F7"/>
                 </a:solidFill>
                 <a:latin typeface="Arial"/>
               </a:rPr>
-              <a:t>Сензори су проверени убацивањем вредности у емулатор</a:t>
-            </a:r>
-          </a:p>
-          <a:p>
-            <a:pPr marL="533400" indent="-279400">
-              <a:lnSpc>
-                <a:spcPct val="105000"/>
-              </a:lnSpc>
-              <a:spcBef>
-                <a:spcPts val="500"/>
-              </a:spcBef>
-              <a:buClr>
-                <a:srgbClr val="48484A"/>
-              </a:buClr>
-              <a:buFont typeface="Arial"/>
-              <a:buChar char="–"/>
-            </a:pPr>
-            <a:r>
-              <a:rPr sz="1300" b="0">
-                <a:solidFill>
-                  <a:srgbClr val="8E8E93"/>
-                </a:solidFill>
-                <a:latin typeface="Arial"/>
-              </a:rPr>
-              <a:t>микрофон само на правом уређају, јер емулатор даје тишину</a:t>
-            </a:r>
-          </a:p>
+              <a:t>микрофон само на правом уређају</a:t>
+            </a:r>
+          </a:p>
+        </p:txBody>
+      </p:sp>
+      <p:sp>
+        <p:nvSpPr>
+          <p:cNvPr id="18" name="TextBox 17"/>
+          <p:cNvSpPr txBox="1"/>
+          <p:nvPr/>
+        </p:nvSpPr>
+        <p:spPr>
+          <a:xfrm>
+            <a:off x="6336792" y="4279392"/>
+            <a:ext cx="2258568" cy="457200"/>
+          </a:xfrm>
+          <a:prstGeom prst="rect">
+            <a:avLst/>
+          </a:prstGeom>
+          <a:noFill/>
+        </p:spPr>
+        <p:txBody>
+          <a:bodyPr wrap="square" lIns="0" rIns="0" tIns="0" bIns="0">
+            <a:spAutoFit/>
+          </a:bodyPr>
+          <a:lstStyle/>
+          <a:p>
+            <a:pPr>
+              <a:spcBef>
+                <a:spcPts val="0"/>
+              </a:spcBef>
+              <a:buNone/>
+            </a:pPr>
+            <a:r>
+              <a:rPr sz="1300" b="1">
+                <a:solidFill>
+                  <a:srgbClr val="FF5500"/>
+                </a:solidFill>
+                <a:latin typeface="Arial"/>
+              </a:rPr>
+              <a:t>ручна провера</a:t>
+            </a:r>
+          </a:p>
+        </p:txBody>
+      </p:sp>
+      <p:sp>
+        <p:nvSpPr>
+          <p:cNvPr id="19" name="Rectangle 18"/>
+          <p:cNvSpPr/>
+          <p:nvPr/>
+        </p:nvSpPr>
+        <p:spPr>
+          <a:xfrm>
+            <a:off x="8915400" y="1783080"/>
+            <a:ext cx="2587752" cy="3063240"/>
+          </a:xfrm>
+          <a:prstGeom prst="rect">
+            <a:avLst/>
+          </a:prstGeom>
+          <a:solidFill>
+            <a:srgbClr val="18181E"/>
+          </a:solidFill>
+          <a:ln w="9525">
+            <a:solidFill>
+              <a:srgbClr val="2A2A32"/>
+            </a:solidFill>
+          </a:ln>
+          <a:effectLst/>
+        </p:spPr>
+        <p:style>
+          <a:lnRef idx="1">
+            <a:schemeClr val="accent1"/>
+          </a:lnRef>
+          <a:fillRef idx="3">
+            <a:schemeClr val="accent1"/>
+          </a:fillRef>
+          <a:effectRef idx="2">
+            <a:schemeClr val="accent1"/>
+          </a:effectRef>
+          <a:fontRef idx="minor">
+            <a:schemeClr val="lt1"/>
+          </a:fontRef>
+        </p:style>
+        <p:txBody>
+          <a:bodyPr rtlCol="0" anchor="ctr"/>
+          <a:lstStyle/>
+          <a:p>
+            <a:pPr algn="ctr"/>
+          </a:p>
+        </p:txBody>
+      </p:sp>
+      <p:sp>
+        <p:nvSpPr>
+          <p:cNvPr id="20" name="Rectangle 19"/>
+          <p:cNvSpPr/>
+          <p:nvPr/>
+        </p:nvSpPr>
+        <p:spPr>
+          <a:xfrm>
+            <a:off x="8915400" y="1783080"/>
+            <a:ext cx="2587752" cy="402336"/>
+          </a:xfrm>
+          <a:prstGeom prst="rect">
+            <a:avLst/>
+          </a:prstGeom>
+          <a:solidFill>
+            <a:srgbClr val="202028"/>
+          </a:solidFill>
+          <a:ln w="9525">
+            <a:solidFill>
+              <a:srgbClr val="2A2A32"/>
+            </a:solidFill>
+          </a:ln>
+          <a:effectLst/>
+        </p:spPr>
+        <p:style>
+          <a:lnRef idx="1">
+            <a:schemeClr val="accent1"/>
+          </a:lnRef>
+          <a:fillRef idx="3">
+            <a:schemeClr val="accent1"/>
+          </a:fillRef>
+          <a:effectRef idx="2">
+            <a:schemeClr val="accent1"/>
+          </a:effectRef>
+          <a:fontRef idx="minor">
+            <a:schemeClr val="lt1"/>
+          </a:fontRef>
+        </p:style>
+        <p:txBody>
+          <a:bodyPr rtlCol="0" anchor="ctr"/>
+          <a:lstStyle/>
+          <a:p>
+            <a:pPr algn="ctr"/>
+          </a:p>
+        </p:txBody>
+      </p:sp>
+      <p:sp>
+        <p:nvSpPr>
+          <p:cNvPr id="21" name="TextBox 20"/>
+          <p:cNvSpPr txBox="1"/>
+          <p:nvPr/>
+        </p:nvSpPr>
+        <p:spPr>
+          <a:xfrm>
+            <a:off x="9079992" y="1892808"/>
+            <a:ext cx="2258568" cy="274320"/>
+          </a:xfrm>
+          <a:prstGeom prst="rect">
+            <a:avLst/>
+          </a:prstGeom>
+          <a:noFill/>
+        </p:spPr>
+        <p:txBody>
+          <a:bodyPr wrap="square" lIns="0" rIns="0" tIns="0" bIns="0">
+            <a:spAutoFit/>
+          </a:bodyPr>
+          <a:lstStyle/>
+          <a:p>
+            <a:pPr>
+              <a:spcBef>
+                <a:spcPts val="0"/>
+              </a:spcBef>
+              <a:buNone/>
+            </a:pPr>
+            <a:r>
+              <a:rPr sz="1300" b="1">
+                <a:solidFill>
+                  <a:srgbClr val="FF5500"/>
+                </a:solidFill>
+                <a:latin typeface="Arial"/>
+              </a:rPr>
+              <a:t>Корисници</a:t>
+            </a:r>
+          </a:p>
+        </p:txBody>
+      </p:sp>
+      <p:sp>
+        <p:nvSpPr>
+          <p:cNvPr id="22" name="TextBox 21"/>
+          <p:cNvSpPr txBox="1"/>
+          <p:nvPr/>
+        </p:nvSpPr>
+        <p:spPr>
+          <a:xfrm>
+            <a:off x="9079992" y="2350008"/>
+            <a:ext cx="2258568" cy="2377440"/>
+          </a:xfrm>
+          <a:prstGeom prst="rect">
+            <a:avLst/>
+          </a:prstGeom>
+          <a:noFill/>
+        </p:spPr>
+        <p:txBody>
+          <a:bodyPr wrap="square" lIns="0" rIns="0" tIns="0" bIns="0">
+            <a:spAutoFit/>
+          </a:bodyPr>
+          <a:lstStyle/>
           <a:p>
             <a:pPr marL="279400" indent="-279400">
               <a:lnSpc>
                 <a:spcPct val="105000"/>
               </a:lnSpc>
               <a:spcBef>
-                <a:spcPts val="1300"/>
+                <a:spcPts val="0"/>
               </a:spcBef>
               <a:buClr>
                 <a:srgbClr val="FF5500"/>
@@ -5389,44 +5997,148 @@
               <a:buChar char="▪"/>
             </a:pPr>
             <a:r>
-              <a:rPr sz="1700" b="0">
+              <a:rPr sz="1200" b="0">
                 <a:solidFill>
                   <a:srgbClr val="F2F2F7"/>
                 </a:solidFill>
                 <a:latin typeface="Arial"/>
               </a:rPr>
-              <a:t>Корисничко тестирање у два круга, 5 па 10 корисника</a:t>
-            </a:r>
-          </a:p>
-          <a:p>
-            <a:pPr marL="533400" indent="-279400">
+              <a:t>два круга, на сопственим телефонима</a:t>
+            </a:r>
+          </a:p>
+          <a:p>
+            <a:pPr marL="279400" indent="-279400">
               <a:lnSpc>
                 <a:spcPct val="105000"/>
               </a:lnSpc>
               <a:spcBef>
-                <a:spcPts val="500"/>
+                <a:spcPts val="1100"/>
               </a:spcBef>
               <a:buClr>
-                <a:srgbClr val="48484A"/>
+                <a:srgbClr val="FF5500"/>
               </a:buClr>
               <a:buFont typeface="Arial"/>
-              <a:buChar char="–"/>
-            </a:pPr>
-            <a:r>
-              <a:rPr sz="1300" b="0">
-                <a:solidFill>
-                  <a:srgbClr val="8E8E93"/>
-                </a:solidFill>
-                <a:latin typeface="Arial"/>
-              </a:rPr>
-              <a:t>четири примедбе ушле су у решење</a:t>
-            </a:r>
-          </a:p>
-        </p:txBody>
-      </p:sp>
-      <p:sp>
-        <p:nvSpPr>
-          <p:cNvPr id="11" name="TextBox 10"/>
+              <a:buChar char="▪"/>
+            </a:pPr>
+            <a:r>
+              <a:rPr sz="1200" b="0">
+                <a:solidFill>
+                  <a:srgbClr val="F2F2F7"/>
+                </a:solidFill>
+                <a:latin typeface="Arial"/>
+              </a:rPr>
+              <a:t>друго коло над исправљеном верзијом</a:t>
+            </a:r>
+          </a:p>
+          <a:p>
+            <a:pPr marL="279400" indent="-279400">
+              <a:lnSpc>
+                <a:spcPct val="105000"/>
+              </a:lnSpc>
+              <a:spcBef>
+                <a:spcPts val="1100"/>
+              </a:spcBef>
+              <a:buClr>
+                <a:srgbClr val="FF5500"/>
+              </a:buClr>
+              <a:buFont typeface="Arial"/>
+              <a:buChar char="▪"/>
+            </a:pPr>
+            <a:r>
+              <a:rPr sz="1200" b="0">
+                <a:solidFill>
+                  <a:srgbClr val="F2F2F7"/>
+                </a:solidFill>
+                <a:latin typeface="Arial"/>
+              </a:rPr>
+              <a:t>четири примедбе ушле у решење</a:t>
+            </a:r>
+          </a:p>
+        </p:txBody>
+      </p:sp>
+      <p:sp>
+        <p:nvSpPr>
+          <p:cNvPr id="23" name="TextBox 22"/>
+          <p:cNvSpPr txBox="1"/>
+          <p:nvPr/>
+        </p:nvSpPr>
+        <p:spPr>
+          <a:xfrm>
+            <a:off x="9079992" y="4279392"/>
+            <a:ext cx="2258568" cy="457200"/>
+          </a:xfrm>
+          <a:prstGeom prst="rect">
+            <a:avLst/>
+          </a:prstGeom>
+          <a:noFill/>
+        </p:spPr>
+        <p:txBody>
+          <a:bodyPr wrap="square" lIns="0" rIns="0" tIns="0" bIns="0">
+            <a:spAutoFit/>
+          </a:bodyPr>
+          <a:lstStyle/>
+          <a:p>
+            <a:pPr>
+              <a:spcBef>
+                <a:spcPts val="0"/>
+              </a:spcBef>
+              <a:buNone/>
+            </a:pPr>
+            <a:r>
+              <a:rPr sz="1300" b="1">
+                <a:solidFill>
+                  <a:srgbClr val="FF5500"/>
+                </a:solidFill>
+                <a:latin typeface="Arial"/>
+              </a:rPr>
+              <a:t>5 па 10 корисника</a:t>
+            </a:r>
+          </a:p>
+        </p:txBody>
+      </p:sp>
+      <p:sp>
+        <p:nvSpPr>
+          <p:cNvPr id="24" name="TextBox 23"/>
+          <p:cNvSpPr txBox="1"/>
+          <p:nvPr/>
+        </p:nvSpPr>
+        <p:spPr>
+          <a:xfrm>
+            <a:off x="685800" y="5257800"/>
+            <a:ext cx="10820095" cy="365760"/>
+          </a:xfrm>
+          <a:prstGeom prst="rect">
+            <a:avLst/>
+          </a:prstGeom>
+          <a:noFill/>
+        </p:spPr>
+        <p:txBody>
+          <a:bodyPr wrap="square" lIns="0" rIns="0" tIns="0" bIns="0">
+            <a:spAutoFit/>
+          </a:bodyPr>
+          <a:lstStyle/>
+          <a:p>
+            <a:pPr>
+              <a:spcBef>
+                <a:spcPts val="0"/>
+              </a:spcBef>
+              <a:buNone/>
+            </a:pPr>
+            <a:r>
+              <a:rPr sz="1500" b="0">
+                <a:solidFill>
+                  <a:srgbClr val="FF5500"/>
+                </a:solidFill>
+                <a:latin typeface="Arial"/>
+              </a:rPr>
+              <a:t>Спремиште је јавно, па се свака бројка проверава једном командом.</a:t>
+            </a:r>
+          </a:p>
+        </p:txBody>
+      </p:sp>
+      <p:sp>
+        <p:nvSpPr>
+          <p:cNvPr id="25" name="TextBox 24"/>
           <p:cNvSpPr txBox="1"/>
           <p:nvPr/>
         </p:nvSpPr>
@@ -5593,14 +6305,146 @@
       </p:sp>
       <p:sp>
         <p:nvSpPr>
-          <p:cNvPr id="4" name="TextBox 3"/>
+          <p:cNvPr id="4" name="Rectangle 3"/>
+          <p:cNvSpPr/>
+          <p:nvPr/>
+        </p:nvSpPr>
+        <p:spPr>
+          <a:xfrm>
+            <a:off x="685800" y="1737360"/>
+            <a:ext cx="3483864" cy="2971800"/>
+          </a:xfrm>
+          <a:prstGeom prst="rect">
+            <a:avLst/>
+          </a:prstGeom>
+          <a:solidFill>
+            <a:srgbClr val="18181E"/>
+          </a:solidFill>
+          <a:ln w="9525">
+            <a:solidFill>
+              <a:srgbClr val="2A2A32"/>
+            </a:solidFill>
+          </a:ln>
+          <a:effectLst/>
+        </p:spPr>
+        <p:style>
+          <a:lnRef idx="1">
+            <a:schemeClr val="accent1"/>
+          </a:lnRef>
+          <a:fillRef idx="3">
+            <a:schemeClr val="accent1"/>
+          </a:fillRef>
+          <a:effectRef idx="2">
+            <a:schemeClr val="accent1"/>
+          </a:effectRef>
+          <a:fontRef idx="minor">
+            <a:schemeClr val="lt1"/>
+          </a:fontRef>
+        </p:style>
+        <p:txBody>
+          <a:bodyPr rtlCol="0" anchor="ctr"/>
+          <a:lstStyle/>
+          <a:p>
+            <a:pPr algn="ctr"/>
+          </a:p>
+        </p:txBody>
+      </p:sp>
+      <p:sp>
+        <p:nvSpPr>
+          <p:cNvPr id="5" name="Rectangle 4"/>
+          <p:cNvSpPr/>
+          <p:nvPr/>
+        </p:nvSpPr>
+        <p:spPr>
+          <a:xfrm>
+            <a:off x="685800" y="1737360"/>
+            <a:ext cx="3483864" cy="402336"/>
+          </a:xfrm>
+          <a:prstGeom prst="rect">
+            <a:avLst/>
+          </a:prstGeom>
+          <a:solidFill>
+            <a:srgbClr val="202028"/>
+          </a:solidFill>
+          <a:ln w="9525">
+            <a:solidFill>
+              <a:srgbClr val="2A2A32"/>
+            </a:solidFill>
+          </a:ln>
+          <a:effectLst/>
+        </p:spPr>
+        <p:style>
+          <a:lnRef idx="1">
+            <a:schemeClr val="accent1"/>
+          </a:lnRef>
+          <a:fillRef idx="3">
+            <a:schemeClr val="accent1"/>
+          </a:fillRef>
+          <a:effectRef idx="2">
+            <a:schemeClr val="accent1"/>
+          </a:effectRef>
+          <a:fontRef idx="minor">
+            <a:schemeClr val="lt1"/>
+          </a:fontRef>
+        </p:style>
+        <p:txBody>
+          <a:bodyPr rtlCol="0" anchor="ctr"/>
+          <a:lstStyle/>
+          <a:p>
+            <a:pPr algn="ctr"/>
+          </a:p>
+        </p:txBody>
+      </p:sp>
+      <p:sp>
+        <p:nvSpPr>
+          <p:cNvPr id="6" name="TextBox 5"/>
           <p:cNvSpPr txBox="1"/>
           <p:nvPr/>
         </p:nvSpPr>
         <p:spPr>
           <a:xfrm>
-            <a:off x="685800" y="1783080"/>
-            <a:ext cx="10789920" cy="4206240"/>
+            <a:off x="850392" y="1847088"/>
+            <a:ext cx="3154680" cy="274320"/>
+          </a:xfrm>
+          <a:prstGeom prst="rect">
+            <a:avLst/>
+          </a:prstGeom>
+          <a:noFill/>
+        </p:spPr>
+        <p:txBody>
+          <a:bodyPr wrap="square" lIns="0" rIns="0" tIns="0" bIns="0">
+            <a:spAutoFit/>
+          </a:bodyPr>
+          <a:lstStyle/>
+          <a:p>
+            <a:pPr>
+              <a:spcBef>
+                <a:spcPts val="0"/>
+              </a:spcBef>
+              <a:buNone/>
+            </a:pPr>
+            <a:r>
+              <a:rPr sz="1300" b="1">
+                <a:solidFill>
+                  <a:srgbClr val="FF5500"/>
+                </a:solidFill>
+                <a:latin typeface="Arial"/>
+              </a:rPr>
+              <a:t>ШТА ЈЕ РАЂЕНО</a:t>
+            </a:r>
+          </a:p>
+        </p:txBody>
+      </p:sp>
+      <p:sp>
+        <p:nvSpPr>
+          <p:cNvPr id="7" name="TextBox 6"/>
+          <p:cNvSpPr txBox="1"/>
+          <p:nvPr/>
+        </p:nvSpPr>
+        <p:spPr>
+          <a:xfrm>
+            <a:off x="850392" y="2304288"/>
+            <a:ext cx="3154680" cy="2286000"/>
           </a:xfrm>
           <a:prstGeom prst="rect">
             <a:avLst/>
@@ -5627,37 +6471,13 @@
               <a:buChar char="▪"/>
             </a:pPr>
             <a:r>
-              <a:rPr sz="1900" b="0">
+              <a:rPr sz="1400" b="0">
                 <a:solidFill>
                   <a:srgbClr val="F2F2F7"/>
                 </a:solidFill>
                 <a:latin typeface="Arial"/>
               </a:rPr>
-              <a:t>Спојено је оно што постојећа решења раде одвојено</a:t>
-            </a:r>
-          </a:p>
-          <a:p>
-            <a:pPr marL="533400" indent="-279400">
-              <a:lnSpc>
-                <a:spcPct val="105000"/>
-              </a:lnSpc>
-              <a:spcBef>
-                <a:spcPts val="500"/>
-              </a:spcBef>
-              <a:buClr>
-                <a:srgbClr val="48484A"/>
-              </a:buClr>
-              <a:buFont typeface="Arial"/>
-              <a:buChar char="–"/>
-            </a:pPr>
-            <a:r>
-              <a:rPr sz="1500" b="0">
-                <a:solidFill>
-                  <a:srgbClr val="8E8E93"/>
-                </a:solidFill>
-                <a:latin typeface="Arial"/>
-              </a:rPr>
-              <a:t>временски ограничена сесија, мерење услова и оцена са образложењем</a:t>
+              <a:t>апликација за фокус сесије са циљем и паузама</a:t>
             </a:r>
           </a:p>
           <a:p>
@@ -5666,7 +6486,7 @@
                 <a:spcPct val="105000"/>
               </a:lnSpc>
               <a:spcBef>
-                <a:spcPts val="1300"/>
+                <a:spcPts val="1100"/>
               </a:spcBef>
               <a:buClr>
                 <a:srgbClr val="FF5500"/>
@@ -5675,37 +6495,13 @@
               <a:buChar char="▪"/>
             </a:pPr>
             <a:r>
-              <a:rPr sz="1900" b="0">
+              <a:rPr sz="1400" b="0">
                 <a:solidFill>
                   <a:srgbClr val="F2F2F7"/>
                 </a:solidFill>
                 <a:latin typeface="Arial"/>
               </a:rPr>
-              <a:t>Решење припада подручју самопраћења, не мерења</a:t>
-            </a:r>
-          </a:p>
-          <a:p>
-            <a:pPr marL="533400" indent="-279400">
-              <a:lnSpc>
-                <a:spcPct val="105000"/>
-              </a:lnSpc>
-              <a:spcBef>
-                <a:spcPts val="500"/>
-              </a:spcBef>
-              <a:buClr>
-                <a:srgbClr val="48484A"/>
-              </a:buClr>
-              <a:buFont typeface="Arial"/>
-              <a:buChar char="–"/>
-            </a:pPr>
-            <a:r>
-              <a:rPr sz="1500" b="0">
-                <a:solidFill>
-                  <a:srgbClr val="8E8E93"/>
-                </a:solidFill>
-                <a:latin typeface="Arial"/>
-              </a:rPr>
-              <a:t>телефон није баждарен инструмент, а скала јачине звука је релативна</a:t>
+              <a:t>мерење осветљења, буке и руковања телефоном</a:t>
             </a:r>
           </a:p>
           <a:p>
@@ -5714,7 +6510,7 @@
                 <a:spcPct val="105000"/>
               </a:lnSpc>
               <a:spcBef>
-                <a:spcPts val="1300"/>
+                <a:spcPts val="1100"/>
               </a:spcBef>
               <a:buClr>
                 <a:srgbClr val="FF5500"/>
@@ -5723,92 +6519,546 @@
               <a:buChar char="▪"/>
             </a:pPr>
             <a:r>
-              <a:rPr sz="1900" b="0">
+              <a:rPr sz="1400" b="0">
                 <a:solidFill>
                   <a:srgbClr val="F2F2F7"/>
                 </a:solidFill>
                 <a:latin typeface="Arial"/>
               </a:rPr>
-              <a:t>Даљи рад</a:t>
-            </a:r>
-          </a:p>
-          <a:p>
-            <a:pPr marL="533400" indent="-279400">
+              <a:t>оцењивање сесије језичким моделом</a:t>
+            </a:r>
+          </a:p>
+          <a:p>
+            <a:pPr marL="279400" indent="-279400">
               <a:lnSpc>
                 <a:spcPct val="105000"/>
               </a:lnSpc>
               <a:spcBef>
-                <a:spcPts val="500"/>
+                <a:spcPts val="1100"/>
               </a:spcBef>
               <a:buClr>
-                <a:srgbClr val="48484A"/>
+                <a:srgbClr val="FF5500"/>
               </a:buClr>
               <a:buFont typeface="Arial"/>
-              <a:buChar char="–"/>
-            </a:pPr>
-            <a:r>
-              <a:rPr sz="1500" b="0">
-                <a:solidFill>
-                  <a:srgbClr val="8E8E93"/>
-                </a:solidFill>
-                <a:latin typeface="Arial"/>
-              </a:rPr>
-              <a:t>провера прагова на правом уређају и калибрација микрофона</a:t>
-            </a:r>
-          </a:p>
-          <a:p>
-            <a:pPr marL="533400" indent="-279400">
+              <a:buChar char="▪"/>
+            </a:pPr>
+            <a:r>
+              <a:rPr sz="1400" b="0">
+                <a:solidFill>
+                  <a:srgbClr val="F2F2F7"/>
+                </a:solidFill>
+                <a:latin typeface="Arial"/>
+              </a:rPr>
+              <a:t>заказивање уз тачне подсетнике</a:t>
+            </a:r>
+          </a:p>
+        </p:txBody>
+      </p:sp>
+      <p:sp>
+        <p:nvSpPr>
+          <p:cNvPr id="8" name="Rectangle 7"/>
+          <p:cNvSpPr/>
+          <p:nvPr/>
+        </p:nvSpPr>
+        <p:spPr>
+          <a:xfrm>
+            <a:off x="4352544" y="1737360"/>
+            <a:ext cx="3483864" cy="2971800"/>
+          </a:xfrm>
+          <a:prstGeom prst="rect">
+            <a:avLst/>
+          </a:prstGeom>
+          <a:solidFill>
+            <a:srgbClr val="18181E"/>
+          </a:solidFill>
+          <a:ln w="9525">
+            <a:solidFill>
+              <a:srgbClr val="2A2A32"/>
+            </a:solidFill>
+          </a:ln>
+          <a:effectLst/>
+        </p:spPr>
+        <p:style>
+          <a:lnRef idx="1">
+            <a:schemeClr val="accent1"/>
+          </a:lnRef>
+          <a:fillRef idx="3">
+            <a:schemeClr val="accent1"/>
+          </a:fillRef>
+          <a:effectRef idx="2">
+            <a:schemeClr val="accent1"/>
+          </a:effectRef>
+          <a:fontRef idx="minor">
+            <a:schemeClr val="lt1"/>
+          </a:fontRef>
+        </p:style>
+        <p:txBody>
+          <a:bodyPr rtlCol="0" anchor="ctr"/>
+          <a:lstStyle/>
+          <a:p>
+            <a:pPr algn="ctr"/>
+          </a:p>
+        </p:txBody>
+      </p:sp>
+      <p:sp>
+        <p:nvSpPr>
+          <p:cNvPr id="9" name="Rectangle 8"/>
+          <p:cNvSpPr/>
+          <p:nvPr/>
+        </p:nvSpPr>
+        <p:spPr>
+          <a:xfrm>
+            <a:off x="4352544" y="1737360"/>
+            <a:ext cx="3483864" cy="402336"/>
+          </a:xfrm>
+          <a:prstGeom prst="rect">
+            <a:avLst/>
+          </a:prstGeom>
+          <a:solidFill>
+            <a:srgbClr val="202028"/>
+          </a:solidFill>
+          <a:ln w="9525">
+            <a:solidFill>
+              <a:srgbClr val="2A2A32"/>
+            </a:solidFill>
+          </a:ln>
+          <a:effectLst/>
+        </p:spPr>
+        <p:style>
+          <a:lnRef idx="1">
+            <a:schemeClr val="accent1"/>
+          </a:lnRef>
+          <a:fillRef idx="3">
+            <a:schemeClr val="accent1"/>
+          </a:fillRef>
+          <a:effectRef idx="2">
+            <a:schemeClr val="accent1"/>
+          </a:effectRef>
+          <a:fontRef idx="minor">
+            <a:schemeClr val="lt1"/>
+          </a:fontRef>
+        </p:style>
+        <p:txBody>
+          <a:bodyPr rtlCol="0" anchor="ctr"/>
+          <a:lstStyle/>
+          <a:p>
+            <a:pPr algn="ctr"/>
+          </a:p>
+        </p:txBody>
+      </p:sp>
+      <p:sp>
+        <p:nvSpPr>
+          <p:cNvPr id="10" name="TextBox 9"/>
+          <p:cNvSpPr txBox="1"/>
+          <p:nvPr/>
+        </p:nvSpPr>
+        <p:spPr>
+          <a:xfrm>
+            <a:off x="4517136" y="1847088"/>
+            <a:ext cx="3154680" cy="274320"/>
+          </a:xfrm>
+          <a:prstGeom prst="rect">
+            <a:avLst/>
+          </a:prstGeom>
+          <a:noFill/>
+        </p:spPr>
+        <p:txBody>
+          <a:bodyPr wrap="square" lIns="0" rIns="0" tIns="0" bIns="0">
+            <a:spAutoFit/>
+          </a:bodyPr>
+          <a:lstStyle/>
+          <a:p>
+            <a:pPr>
+              <a:spcBef>
+                <a:spcPts val="0"/>
+              </a:spcBef>
+              <a:buNone/>
+            </a:pPr>
+            <a:r>
+              <a:rPr sz="1300" b="1">
+                <a:solidFill>
+                  <a:srgbClr val="FF5500"/>
+                </a:solidFill>
+                <a:latin typeface="Arial"/>
+              </a:rPr>
+              <a:t>ШТА ЈЕ УРАЂЕНО</a:t>
+            </a:r>
+          </a:p>
+        </p:txBody>
+      </p:sp>
+      <p:sp>
+        <p:nvSpPr>
+          <p:cNvPr id="11" name="TextBox 10"/>
+          <p:cNvSpPr txBox="1"/>
+          <p:nvPr/>
+        </p:nvSpPr>
+        <p:spPr>
+          <a:xfrm>
+            <a:off x="4517136" y="2304288"/>
+            <a:ext cx="3154680" cy="2286000"/>
+          </a:xfrm>
+          <a:prstGeom prst="rect">
+            <a:avLst/>
+          </a:prstGeom>
+          <a:noFill/>
+        </p:spPr>
+        <p:txBody>
+          <a:bodyPr wrap="square" lIns="0" rIns="0" tIns="0" bIns="0">
+            <a:spAutoFit/>
+          </a:bodyPr>
+          <a:lstStyle/>
+          <a:p>
+            <a:pPr marL="279400" indent="-279400">
               <a:lnSpc>
                 <a:spcPct val="105000"/>
               </a:lnSpc>
               <a:spcBef>
-                <a:spcPts val="500"/>
+                <a:spcPts val="0"/>
               </a:spcBef>
               <a:buClr>
-                <a:srgbClr val="48484A"/>
+                <a:srgbClr val="FF5500"/>
               </a:buClr>
               <a:buFont typeface="Arial"/>
-              <a:buChar char="–"/>
-            </a:pPr>
-            <a:r>
-              <a:rPr sz="1500" b="0">
-                <a:solidFill>
-                  <a:srgbClr val="8E8E93"/>
-                </a:solidFill>
-                <a:latin typeface="Arial"/>
-              </a:rPr>
-              <a:t>уочени обрасци као улаз у оцену</a:t>
-            </a:r>
-          </a:p>
-          <a:p>
-            <a:pPr marL="533400" indent="-279400">
+              <a:buChar char="▪"/>
+            </a:pPr>
+            <a:r>
+              <a:rPr sz="1400" b="0">
+                <a:solidFill>
+                  <a:srgbClr val="F2F2F7"/>
+                </a:solidFill>
+                <a:latin typeface="Arial"/>
+              </a:rPr>
+              <a:t>мерење услова рада и оцена сесије на једном месту</a:t>
+            </a:r>
+          </a:p>
+          <a:p>
+            <a:pPr marL="279400" indent="-279400">
               <a:lnSpc>
                 <a:spcPct val="105000"/>
               </a:lnSpc>
               <a:spcBef>
-                <a:spcPts val="500"/>
+                <a:spcPts val="1100"/>
               </a:spcBef>
               <a:buClr>
-                <a:srgbClr val="48484A"/>
+                <a:srgbClr val="FF5500"/>
               </a:buClr>
               <a:buFont typeface="Arial"/>
-              <a:buChar char="–"/>
-            </a:pPr>
-            <a:r>
-              <a:rPr sz="1500" b="0">
-                <a:solidFill>
-                  <a:srgbClr val="8E8E93"/>
-                </a:solidFill>
-                <a:latin typeface="Arial"/>
-              </a:rPr>
-              <a:t>прилагођавање прагова навикама корисника</a:t>
-            </a:r>
-          </a:p>
-        </p:txBody>
-      </p:sp>
-      <p:sp>
-        <p:nvSpPr>
-          <p:cNvPr id="5" name="TextBox 4"/>
+              <a:buChar char="▪"/>
+            </a:pPr>
+            <a:r>
+              <a:rPr sz="1400" b="0">
+                <a:solidFill>
+                  <a:srgbClr val="F2F2F7"/>
+                </a:solidFill>
+                <a:latin typeface="Arial"/>
+              </a:rPr>
+              <a:t>намерно без блокирања и без игрификације</a:t>
+            </a:r>
+          </a:p>
+          <a:p>
+            <a:pPr marL="279400" indent="-279400">
+              <a:lnSpc>
+                <a:spcPct val="105000"/>
+              </a:lnSpc>
+              <a:spcBef>
+                <a:spcPts val="1100"/>
+              </a:spcBef>
+              <a:buClr>
+                <a:srgbClr val="FF5500"/>
+              </a:buClr>
+              <a:buFont typeface="Arial"/>
+              <a:buChar char="▪"/>
+            </a:pPr>
+            <a:r>
+              <a:rPr sz="1400" b="0">
+                <a:solidFill>
+                  <a:srgbClr val="F2F2F7"/>
+                </a:solidFill>
+                <a:latin typeface="Arial"/>
+              </a:rPr>
+              <a:t>оцена се добије увек, и без мреже</a:t>
+            </a:r>
+          </a:p>
+          <a:p>
+            <a:pPr marL="279400" indent="-279400">
+              <a:lnSpc>
+                <a:spcPct val="105000"/>
+              </a:lnSpc>
+              <a:spcBef>
+                <a:spcPts val="1100"/>
+              </a:spcBef>
+              <a:buClr>
+                <a:srgbClr val="FF5500"/>
+              </a:buClr>
+              <a:buFont typeface="Arial"/>
+              <a:buChar char="▪"/>
+            </a:pPr>
+            <a:r>
+              <a:rPr sz="1400" b="0">
+                <a:solidFill>
+                  <a:srgbClr val="F2F2F7"/>
+                </a:solidFill>
+                <a:latin typeface="Arial"/>
+              </a:rPr>
+              <a:t>проверено тестовима и са корисницима</a:t>
+            </a:r>
+          </a:p>
+        </p:txBody>
+      </p:sp>
+      <p:sp>
+        <p:nvSpPr>
+          <p:cNvPr id="12" name="Rectangle 11"/>
+          <p:cNvSpPr/>
+          <p:nvPr/>
+        </p:nvSpPr>
+        <p:spPr>
+          <a:xfrm>
+            <a:off x="8019288" y="1737360"/>
+            <a:ext cx="3483864" cy="2971800"/>
+          </a:xfrm>
+          <a:prstGeom prst="rect">
+            <a:avLst/>
+          </a:prstGeom>
+          <a:solidFill>
+            <a:srgbClr val="18181E"/>
+          </a:solidFill>
+          <a:ln w="9525">
+            <a:solidFill>
+              <a:srgbClr val="2A2A32"/>
+            </a:solidFill>
+          </a:ln>
+          <a:effectLst/>
+        </p:spPr>
+        <p:style>
+          <a:lnRef idx="1">
+            <a:schemeClr val="accent1"/>
+          </a:lnRef>
+          <a:fillRef idx="3">
+            <a:schemeClr val="accent1"/>
+          </a:fillRef>
+          <a:effectRef idx="2">
+            <a:schemeClr val="accent1"/>
+          </a:effectRef>
+          <a:fontRef idx="minor">
+            <a:schemeClr val="lt1"/>
+          </a:fontRef>
+        </p:style>
+        <p:txBody>
+          <a:bodyPr rtlCol="0" anchor="ctr"/>
+          <a:lstStyle/>
+          <a:p>
+            <a:pPr algn="ctr"/>
+          </a:p>
+        </p:txBody>
+      </p:sp>
+      <p:sp>
+        <p:nvSpPr>
+          <p:cNvPr id="13" name="Rectangle 12"/>
+          <p:cNvSpPr/>
+          <p:nvPr/>
+        </p:nvSpPr>
+        <p:spPr>
+          <a:xfrm>
+            <a:off x="8019288" y="1737360"/>
+            <a:ext cx="3483864" cy="402336"/>
+          </a:xfrm>
+          <a:prstGeom prst="rect">
+            <a:avLst/>
+          </a:prstGeom>
+          <a:solidFill>
+            <a:srgbClr val="202028"/>
+          </a:solidFill>
+          <a:ln w="9525">
+            <a:solidFill>
+              <a:srgbClr val="2A2A32"/>
+            </a:solidFill>
+          </a:ln>
+          <a:effectLst/>
+        </p:spPr>
+        <p:style>
+          <a:lnRef idx="1">
+            <a:schemeClr val="accent1"/>
+          </a:lnRef>
+          <a:fillRef idx="3">
+            <a:schemeClr val="accent1"/>
+          </a:fillRef>
+          <a:effectRef idx="2">
+            <a:schemeClr val="accent1"/>
+          </a:effectRef>
+          <a:fontRef idx="minor">
+            <a:schemeClr val="lt1"/>
+          </a:fontRef>
+        </p:style>
+        <p:txBody>
+          <a:bodyPr rtlCol="0" anchor="ctr"/>
+          <a:lstStyle/>
+          <a:p>
+            <a:pPr algn="ctr"/>
+          </a:p>
+        </p:txBody>
+      </p:sp>
+      <p:sp>
+        <p:nvSpPr>
+          <p:cNvPr id="14" name="TextBox 13"/>
+          <p:cNvSpPr txBox="1"/>
+          <p:nvPr/>
+        </p:nvSpPr>
+        <p:spPr>
+          <a:xfrm>
+            <a:off x="8183880" y="1847088"/>
+            <a:ext cx="3154680" cy="274320"/>
+          </a:xfrm>
+          <a:prstGeom prst="rect">
+            <a:avLst/>
+          </a:prstGeom>
+          <a:noFill/>
+        </p:spPr>
+        <p:txBody>
+          <a:bodyPr wrap="square" lIns="0" rIns="0" tIns="0" bIns="0">
+            <a:spAutoFit/>
+          </a:bodyPr>
+          <a:lstStyle/>
+          <a:p>
+            <a:pPr>
+              <a:spcBef>
+                <a:spcPts val="0"/>
+              </a:spcBef>
+              <a:buNone/>
+            </a:pPr>
+            <a:r>
+              <a:rPr sz="1300" b="1">
+                <a:solidFill>
+                  <a:srgbClr val="FF5500"/>
+                </a:solidFill>
+                <a:latin typeface="Arial"/>
+              </a:rPr>
+              <a:t>ШТА ДАЉЕ</a:t>
+            </a:r>
+          </a:p>
+        </p:txBody>
+      </p:sp>
+      <p:sp>
+        <p:nvSpPr>
+          <p:cNvPr id="15" name="TextBox 14"/>
+          <p:cNvSpPr txBox="1"/>
+          <p:nvPr/>
+        </p:nvSpPr>
+        <p:spPr>
+          <a:xfrm>
+            <a:off x="8183880" y="2304288"/>
+            <a:ext cx="3154680" cy="2286000"/>
+          </a:xfrm>
+          <a:prstGeom prst="rect">
+            <a:avLst/>
+          </a:prstGeom>
+          <a:noFill/>
+        </p:spPr>
+        <p:txBody>
+          <a:bodyPr wrap="square" lIns="0" rIns="0" tIns="0" bIns="0">
+            <a:spAutoFit/>
+          </a:bodyPr>
+          <a:lstStyle/>
+          <a:p>
+            <a:pPr marL="279400" indent="-279400">
+              <a:lnSpc>
+                <a:spcPct val="105000"/>
+              </a:lnSpc>
+              <a:spcBef>
+                <a:spcPts val="0"/>
+              </a:spcBef>
+              <a:buClr>
+                <a:srgbClr val="FF5500"/>
+              </a:buClr>
+              <a:buFont typeface="Arial"/>
+              <a:buChar char="▪"/>
+            </a:pPr>
+            <a:r>
+              <a:rPr sz="1400" b="0">
+                <a:solidFill>
+                  <a:srgbClr val="F2F2F7"/>
+                </a:solidFill>
+                <a:latin typeface="Arial"/>
+              </a:rPr>
+              <a:t>развој у дубину, а не у ширину</a:t>
+            </a:r>
+          </a:p>
+          <a:p>
+            <a:pPr marL="279400" indent="-279400">
+              <a:lnSpc>
+                <a:spcPct val="105000"/>
+              </a:lnSpc>
+              <a:spcBef>
+                <a:spcPts val="1100"/>
+              </a:spcBef>
+              <a:buClr>
+                <a:srgbClr val="FF5500"/>
+              </a:buClr>
+              <a:buFont typeface="Arial"/>
+              <a:buChar char="▪"/>
+            </a:pPr>
+            <a:r>
+              <a:rPr sz="1400" b="0">
+                <a:solidFill>
+                  <a:srgbClr val="F2F2F7"/>
+                </a:solidFill>
+                <a:latin typeface="Arial"/>
+              </a:rPr>
+              <a:t>модел специјализован за психологију фокуса</a:t>
+            </a:r>
+          </a:p>
+          <a:p>
+            <a:pPr marL="279400" indent="-279400">
+              <a:lnSpc>
+                <a:spcPct val="105000"/>
+              </a:lnSpc>
+              <a:spcBef>
+                <a:spcPts val="1100"/>
+              </a:spcBef>
+              <a:buClr>
+                <a:srgbClr val="FF5500"/>
+              </a:buClr>
+              <a:buFont typeface="Arial"/>
+              <a:buChar char="▪"/>
+            </a:pPr>
+            <a:r>
+              <a:rPr sz="1400" b="0">
+                <a:solidFill>
+                  <a:srgbClr val="F2F2F7"/>
+                </a:solidFill>
+                <a:latin typeface="Arial"/>
+              </a:rPr>
+              <a:t>недељна препорука уместо игрификације</a:t>
+            </a:r>
+          </a:p>
+          <a:p>
+            <a:pPr marL="279400" indent="-279400">
+              <a:lnSpc>
+                <a:spcPct val="105000"/>
+              </a:lnSpc>
+              <a:spcBef>
+                <a:spcPts val="1100"/>
+              </a:spcBef>
+              <a:buClr>
+                <a:srgbClr val="FF5500"/>
+              </a:buClr>
+              <a:buFont typeface="Arial"/>
+              <a:buChar char="▪"/>
+            </a:pPr>
+            <a:r>
+              <a:rPr sz="1400" b="0">
+                <a:solidFill>
+                  <a:srgbClr val="F2F2F7"/>
+                </a:solidFill>
+                <a:latin typeface="Arial"/>
+              </a:rPr>
+              <a:t>сензори свесни онога што се ради</a:t>
+            </a:r>
+          </a:p>
+        </p:txBody>
+      </p:sp>
+      <p:sp>
+        <p:nvSpPr>
+          <p:cNvPr id="16" name="TextBox 15"/>
           <p:cNvSpPr txBox="1"/>
           <p:nvPr/>
         </p:nvSpPr>
@@ -6734,6 +7984,78 @@
               <a:t>„колико сам заиста радио” остаје без одговора</a:t>
             </a:r>
           </a:p>
+          <a:p>
+            <a:pPr marL="279400" indent="-279400">
+              <a:lnSpc>
+                <a:spcPct val="105000"/>
+              </a:lnSpc>
+              <a:spcBef>
+                <a:spcPts val="1300"/>
+              </a:spcBef>
+              <a:buClr>
+                <a:srgbClr val="FF5500"/>
+              </a:buClr>
+              <a:buFont typeface="Arial"/>
+              <a:buChar char="▪"/>
+            </a:pPr>
+            <a:r>
+              <a:rPr sz="1900" b="0">
+                <a:solidFill>
+                  <a:srgbClr val="F2F2F7"/>
+                </a:solidFill>
+                <a:latin typeface="Arial"/>
+              </a:rPr>
+              <a:t>Циљна група</a:t>
+            </a:r>
+          </a:p>
+          <a:p>
+            <a:pPr marL="533400" indent="-279400">
+              <a:lnSpc>
+                <a:spcPct val="105000"/>
+              </a:lnSpc>
+              <a:spcBef>
+                <a:spcPts val="500"/>
+              </a:spcBef>
+              <a:buClr>
+                <a:srgbClr val="48484A"/>
+              </a:buClr>
+              <a:buFont typeface="Arial"/>
+              <a:buChar char="–"/>
+            </a:pPr>
+            <a:r>
+              <a:rPr sz="1500" b="0">
+                <a:solidFill>
+                  <a:srgbClr val="8E8E93"/>
+                </a:solidFill>
+                <a:latin typeface="Arial"/>
+              </a:rPr>
+              <a:t>„рад на себи” тренд</a:t>
+            </a:r>
+          </a:p>
+          <a:p>
+            <a:pPr marL="533400" indent="-279400">
+              <a:lnSpc>
+                <a:spcPct val="105000"/>
+              </a:lnSpc>
+              <a:spcBef>
+                <a:spcPts val="500"/>
+              </a:spcBef>
+              <a:buClr>
+                <a:srgbClr val="48484A"/>
+              </a:buClr>
+              <a:buFont typeface="Arial"/>
+              <a:buChar char="–"/>
+            </a:pPr>
+            <a:r>
+              <a:rPr sz="1500" b="0">
+                <a:solidFill>
+                  <a:srgbClr val="8E8E93"/>
+                </a:solidFill>
+                <a:latin typeface="Arial"/>
+              </a:rPr>
+              <a:t>таквом кориснику треба подршка, а не забрана</a:t>
+            </a:r>
+          </a:p>
         </p:txBody>
       </p:sp>
       <p:sp>
@@ -6913,7 +8235,7 @@
         </p:nvGraphicFramePr>
         <p:xfrm>
           <a:off x="685800" y="1691640"/>
-          <a:ext cx="10515600" cy="3931920"/>
+          <a:ext cx="10789920" cy="3931920"/>
         </p:xfrm>
         <a:graphic>
           <a:graphicData uri="http://schemas.openxmlformats.org/drawingml/2006/table">
@@ -6922,12 +8244,14 @@
                 <a:tableStyleId>{5C22544A-7EE6-4342-B048-85BDC9FD1C3A}</a:tableStyleId>
               </a:tblPr>
               <a:tblGrid>
-                <a:gridCol w="2651760"/>
-                <a:gridCol w="1572768"/>
-                <a:gridCol w="1572768"/>
-                <a:gridCol w="1572768"/>
-                <a:gridCol w="1572768"/>
-                <a:gridCol w="1572768"/>
+                <a:gridCol w="2286000"/>
+                <a:gridCol w="1143000"/>
+                <a:gridCol w="1143000"/>
+                <a:gridCol w="1078992"/>
+                <a:gridCol w="1143000"/>
+                <a:gridCol w="1344168"/>
+                <a:gridCol w="1170432"/>
+                <a:gridCol w="1481328"/>
               </a:tblGrid>
               <a:tr h="393192">
                 <a:tc>
@@ -7076,6 +8400,57 @@
                         </a:rPr>
                         <a:t>разликовање
 пауза</a:t>
+                      </a:r>
+                    </a:p>
+                  </a:txBody>
+                  <a:tcPr marL="76200" marR="76200" marT="25400" marB="25400" anchor="ctr">
+                    <a:solidFill>
+                      <a:srgbClr val="202028"/>
+                    </a:solidFill>
+                  </a:tcPr>
+                </a:tc>
+                <a:tc>
+                  <a:txBody>
+                    <a:bodyPr wrap="square"/>
+                    <a:lstStyle/>
+                    <a:p>
+                      <a:pPr algn="ctr">
+                        <a:buNone/>
+                      </a:pPr>
+                      <a:r>
+                        <a:rPr sz="1300" b="1">
+                          <a:solidFill>
+                            <a:srgbClr val="F2F2F7"/>
+                          </a:solidFill>
+                          <a:latin typeface="Arial"/>
+                        </a:rPr>
+                        <a:t>блокирање
+садржаја</a:t>
+                      </a:r>
+                    </a:p>
+                  </a:txBody>
+                  <a:tcPr marL="76200" marR="76200" marT="25400" marB="25400" anchor="ctr">
+                    <a:solidFill>
+                      <a:srgbClr val="202028"/>
+                    </a:solidFill>
+                  </a:tcPr>
+                </a:tc>
+                <a:tc>
+                  <a:txBody>
+                    <a:bodyPr wrap="square"/>
+                    <a:lstStyle/>
+                    <a:p>
+                      <a:pPr algn="ctr">
+                        <a:buNone/>
+                      </a:pPr>
+                      <a:r>
+                        <a:rPr sz="1300" b="1">
+                          <a:solidFill>
+                            <a:srgbClr val="F2F2F7"/>
+                          </a:solidFill>
+                          <a:latin typeface="Arial"/>
+                        </a:rPr>
+                        <a:t>гејмификација</a:t>
                       </a:r>
                     </a:p>
                   </a:txBody>
@@ -7237,6 +8612,56 @@
                     </a:solidFill>
                   </a:tcPr>
                 </a:tc>
+                <a:tc>
+                  <a:txBody>
+                    <a:bodyPr wrap="square"/>
+                    <a:lstStyle/>
+                    <a:p>
+                      <a:pPr algn="ctr">
+                        <a:buNone/>
+                      </a:pPr>
+                      <a:r>
+                        <a:rPr sz="1300" b="0">
+                          <a:solidFill>
+                            <a:srgbClr val="F2F2F7"/>
+                          </a:solidFill>
+                          <a:latin typeface="Segoe UI Symbol"/>
+                        </a:rPr>
+                        <a:t>✓</a:t>
+                      </a:r>
+                    </a:p>
+                  </a:txBody>
+                  <a:tcPr marL="76200" marR="76200" marT="25400" marB="25400" anchor="ctr">
+                    <a:solidFill>
+                      <a:srgbClr val="08080C"/>
+                    </a:solidFill>
+                  </a:tcPr>
+                </a:tc>
+                <a:tc>
+                  <a:txBody>
+                    <a:bodyPr wrap="square"/>
+                    <a:lstStyle/>
+                    <a:p>
+                      <a:pPr algn="ctr">
+                        <a:buNone/>
+                      </a:pPr>
+                      <a:r>
+                        <a:rPr sz="1300" b="0">
+                          <a:solidFill>
+                            <a:srgbClr val="F2F2F7"/>
+                          </a:solidFill>
+                          <a:latin typeface="Segoe UI Symbol"/>
+                        </a:rPr>
+                        <a:t>✓</a:t>
+                      </a:r>
+                    </a:p>
+                  </a:txBody>
+                  <a:tcPr marL="76200" marR="76200" marT="25400" marB="25400" anchor="ctr">
+                    <a:solidFill>
+                      <a:srgbClr val="08080C"/>
+                    </a:solidFill>
+                  </a:tcPr>
+                </a:tc>
               </a:tr>
               <a:tr h="393192">
                 <a:tc>
@@ -7355,6 +8780,56 @@
                           <a:latin typeface="Segoe UI Symbol"/>
                         </a:rPr>
                         <a:t>✗</a:t>
+                      </a:r>
+                    </a:p>
+                  </a:txBody>
+                  <a:tcPr marL="76200" marR="76200" marT="25400" marB="25400" anchor="ctr">
+                    <a:solidFill>
+                      <a:srgbClr val="08080C"/>
+                    </a:solidFill>
+                  </a:tcPr>
+                </a:tc>
+                <a:tc>
+                  <a:txBody>
+                    <a:bodyPr wrap="square"/>
+                    <a:lstStyle/>
+                    <a:p>
+                      <a:pPr algn="ctr">
+                        <a:buNone/>
+                      </a:pPr>
+                      <a:r>
+                        <a:rPr sz="1300" b="0">
+                          <a:solidFill>
+                            <a:srgbClr val="48484A"/>
+                          </a:solidFill>
+                          <a:latin typeface="Segoe UI Symbol"/>
+                        </a:rPr>
+                        <a:t>✗</a:t>
+                      </a:r>
+                    </a:p>
+                  </a:txBody>
+                  <a:tcPr marL="76200" marR="76200" marT="25400" marB="25400" anchor="ctr">
+                    <a:solidFill>
+                      <a:srgbClr val="08080C"/>
+                    </a:solidFill>
+                  </a:tcPr>
+                </a:tc>
+                <a:tc>
+                  <a:txBody>
+                    <a:bodyPr wrap="square"/>
+                    <a:lstStyle/>
+                    <a:p>
+                      <a:pPr algn="ctr">
+                        <a:buNone/>
+                      </a:pPr>
+                      <a:r>
+                        <a:rPr sz="1300" b="0">
+                          <a:solidFill>
+                            <a:srgbClr val="F2F2F7"/>
+                          </a:solidFill>
+                          <a:latin typeface="Segoe UI Symbol"/>
+                        </a:rPr>
+                        <a:t>✓</a:t>
                       </a:r>
                     </a:p>
                   </a:txBody>
@@ -7541,6 +9016,56 @@
                     </a:solidFill>
                   </a:tcPr>
                 </a:tc>
+                <a:tc>
+                  <a:txBody>
+                    <a:bodyPr wrap="square"/>
+                    <a:lstStyle/>
+                    <a:p>
+                      <a:pPr algn="ctr">
+                        <a:buNone/>
+                      </a:pPr>
+                      <a:r>
+                        <a:rPr sz="1300" b="0">
+                          <a:solidFill>
+                            <a:srgbClr val="F2F2F7"/>
+                          </a:solidFill>
+                          <a:latin typeface="Segoe UI Symbol"/>
+                        </a:rPr>
+                        <a:t>✓</a:t>
+                      </a:r>
+                    </a:p>
+                  </a:txBody>
+                  <a:tcPr marL="76200" marR="76200" marT="25400" marB="25400" anchor="ctr">
+                    <a:solidFill>
+                      <a:srgbClr val="08080C"/>
+                    </a:solidFill>
+                  </a:tcPr>
+                </a:tc>
+                <a:tc>
+                  <a:txBody>
+                    <a:bodyPr wrap="square"/>
+                    <a:lstStyle/>
+                    <a:p>
+                      <a:pPr algn="ctr">
+                        <a:buNone/>
+                      </a:pPr>
+                      <a:r>
+                        <a:rPr sz="1300" b="0">
+                          <a:solidFill>
+                            <a:srgbClr val="48484A"/>
+                          </a:solidFill>
+                          <a:latin typeface="Segoe UI Symbol"/>
+                        </a:rPr>
+                        <a:t>✗</a:t>
+                      </a:r>
+                    </a:p>
+                  </a:txBody>
+                  <a:tcPr marL="76200" marR="76200" marT="25400" marB="25400" anchor="ctr">
+                    <a:solidFill>
+                      <a:srgbClr val="08080C"/>
+                    </a:solidFill>
+                  </a:tcPr>
+                </a:tc>
               </a:tr>
               <a:tr h="393192">
                 <a:tc>
@@ -7693,6 +9218,56 @@
                     </a:solidFill>
                   </a:tcPr>
                 </a:tc>
+                <a:tc>
+                  <a:txBody>
+                    <a:bodyPr wrap="square"/>
+                    <a:lstStyle/>
+                    <a:p>
+                      <a:pPr algn="ctr">
+                        <a:buNone/>
+                      </a:pPr>
+                      <a:r>
+                        <a:rPr sz="1300" b="0">
+                          <a:solidFill>
+                            <a:srgbClr val="F2F2F7"/>
+                          </a:solidFill>
+                          <a:latin typeface="Segoe UI Symbol"/>
+                        </a:rPr>
+                        <a:t>✓</a:t>
+                      </a:r>
+                    </a:p>
+                  </a:txBody>
+                  <a:tcPr marL="76200" marR="76200" marT="25400" marB="25400" anchor="ctr">
+                    <a:solidFill>
+                      <a:srgbClr val="08080C"/>
+                    </a:solidFill>
+                  </a:tcPr>
+                </a:tc>
+                <a:tc>
+                  <a:txBody>
+                    <a:bodyPr wrap="square"/>
+                    <a:lstStyle/>
+                    <a:p>
+                      <a:pPr algn="ctr">
+                        <a:buNone/>
+                      </a:pPr>
+                      <a:r>
+                        <a:rPr sz="1300" b="0">
+                          <a:solidFill>
+                            <a:srgbClr val="48484A"/>
+                          </a:solidFill>
+                          <a:latin typeface="Segoe UI Symbol"/>
+                        </a:rPr>
+                        <a:t>✗</a:t>
+                      </a:r>
+                    </a:p>
+                  </a:txBody>
+                  <a:tcPr marL="76200" marR="76200" marT="25400" marB="25400" anchor="ctr">
+                    <a:solidFill>
+                      <a:srgbClr val="08080C"/>
+                    </a:solidFill>
+                  </a:tcPr>
+                </a:tc>
               </a:tr>
               <a:tr h="393192">
                 <a:tc>
@@ -7711,6 +9286,56 @@
                           <a:latin typeface="Arial"/>
                         </a:rPr>
                         <a:t>Rize</a:t>
+                      </a:r>
+                    </a:p>
+                  </a:txBody>
+                  <a:tcPr marL="76200" marR="76200" marT="25400" marB="25400" anchor="ctr">
+                    <a:solidFill>
+                      <a:srgbClr val="08080C"/>
+                    </a:solidFill>
+                  </a:tcPr>
+                </a:tc>
+                <a:tc>
+                  <a:txBody>
+                    <a:bodyPr wrap="square"/>
+                    <a:lstStyle/>
+                    <a:p>
+                      <a:pPr algn="ctr">
+                        <a:buNone/>
+                      </a:pPr>
+                      <a:r>
+                        <a:rPr sz="1300" b="0">
+                          <a:solidFill>
+                            <a:srgbClr val="48484A"/>
+                          </a:solidFill>
+                          <a:latin typeface="Segoe UI Symbol"/>
+                        </a:rPr>
+                        <a:t>✗</a:t>
+                      </a:r>
+                    </a:p>
+                  </a:txBody>
+                  <a:tcPr marL="76200" marR="76200" marT="25400" marB="25400" anchor="ctr">
+                    <a:solidFill>
+                      <a:srgbClr val="08080C"/>
+                    </a:solidFill>
+                  </a:tcPr>
+                </a:tc>
+                <a:tc>
+                  <a:txBody>
+                    <a:bodyPr wrap="square"/>
+                    <a:lstStyle/>
+                    <a:p>
+                      <a:pPr algn="ctr">
+                        <a:buNone/>
+                      </a:pPr>
+                      <a:r>
+                        <a:rPr sz="1300" b="0">
+                          <a:solidFill>
+                            <a:srgbClr val="48484A"/>
+                          </a:solidFill>
+                          <a:latin typeface="Segoe UI Symbol"/>
+                        </a:rPr>
+                        <a:t>✗</a:t>
                       </a:r>
                     </a:p>
                   </a:txBody>
@@ -7997,6 +9622,56 @@
                     </a:solidFill>
                   </a:tcPr>
                 </a:tc>
+                <a:tc>
+                  <a:txBody>
+                    <a:bodyPr wrap="square"/>
+                    <a:lstStyle/>
+                    <a:p>
+                      <a:pPr algn="ctr">
+                        <a:buNone/>
+                      </a:pPr>
+                      <a:r>
+                        <a:rPr sz="1300" b="0">
+                          <a:solidFill>
+                            <a:srgbClr val="48484A"/>
+                          </a:solidFill>
+                          <a:latin typeface="Segoe UI Symbol"/>
+                        </a:rPr>
+                        <a:t>✗</a:t>
+                      </a:r>
+                    </a:p>
+                  </a:txBody>
+                  <a:tcPr marL="76200" marR="76200" marT="25400" marB="25400" anchor="ctr">
+                    <a:solidFill>
+                      <a:srgbClr val="08080C"/>
+                    </a:solidFill>
+                  </a:tcPr>
+                </a:tc>
+                <a:tc>
+                  <a:txBody>
+                    <a:bodyPr wrap="square"/>
+                    <a:lstStyle/>
+                    <a:p>
+                      <a:pPr algn="ctr">
+                        <a:buNone/>
+                      </a:pPr>
+                      <a:r>
+                        <a:rPr sz="1300" b="0">
+                          <a:solidFill>
+                            <a:srgbClr val="48484A"/>
+                          </a:solidFill>
+                          <a:latin typeface="Segoe UI Symbol"/>
+                        </a:rPr>
+                        <a:t>✗</a:t>
+                      </a:r>
+                    </a:p>
+                  </a:txBody>
+                  <a:tcPr marL="76200" marR="76200" marT="25400" marB="25400" anchor="ctr">
+                    <a:solidFill>
+                      <a:srgbClr val="08080C"/>
+                    </a:solidFill>
+                  </a:tcPr>
+                </a:tc>
               </a:tr>
               <a:tr h="393192">
                 <a:tc>
@@ -8149,6 +9824,56 @@
                     </a:solidFill>
                   </a:tcPr>
                 </a:tc>
+                <a:tc>
+                  <a:txBody>
+                    <a:bodyPr wrap="square"/>
+                    <a:lstStyle/>
+                    <a:p>
+                      <a:pPr algn="ctr">
+                        <a:buNone/>
+                      </a:pPr>
+                      <a:r>
+                        <a:rPr sz="1300" b="0">
+                          <a:solidFill>
+                            <a:srgbClr val="48484A"/>
+                          </a:solidFill>
+                          <a:latin typeface="Segoe UI Symbol"/>
+                        </a:rPr>
+                        <a:t>✗</a:t>
+                      </a:r>
+                    </a:p>
+                  </a:txBody>
+                  <a:tcPr marL="76200" marR="76200" marT="25400" marB="25400" anchor="ctr">
+                    <a:solidFill>
+                      <a:srgbClr val="08080C"/>
+                    </a:solidFill>
+                  </a:tcPr>
+                </a:tc>
+                <a:tc>
+                  <a:txBody>
+                    <a:bodyPr wrap="square"/>
+                    <a:lstStyle/>
+                    <a:p>
+                      <a:pPr algn="ctr">
+                        <a:buNone/>
+                      </a:pPr>
+                      <a:r>
+                        <a:rPr sz="1300" b="0">
+                          <a:solidFill>
+                            <a:srgbClr val="F2F2F7"/>
+                          </a:solidFill>
+                          <a:latin typeface="Segoe UI Symbol"/>
+                        </a:rPr>
+                        <a:t>✓</a:t>
+                      </a:r>
+                    </a:p>
+                  </a:txBody>
+                  <a:tcPr marL="76200" marR="76200" marT="25400" marB="25400" anchor="ctr">
+                    <a:solidFill>
+                      <a:srgbClr val="08080C"/>
+                    </a:solidFill>
+                  </a:tcPr>
+                </a:tc>
               </a:tr>
               <a:tr h="393192">
                 <a:tc>
@@ -8242,6 +9967,56 @@
                           <a:latin typeface="Segoe UI Symbol"/>
                         </a:rPr>
                         <a:t>✓</a:t>
+                      </a:r>
+                    </a:p>
+                  </a:txBody>
+                  <a:tcPr marL="76200" marR="76200" marT="25400" marB="25400" anchor="ctr">
+                    <a:solidFill>
+                      <a:srgbClr val="08080C"/>
+                    </a:solidFill>
+                  </a:tcPr>
+                </a:tc>
+                <a:tc>
+                  <a:txBody>
+                    <a:bodyPr wrap="square"/>
+                    <a:lstStyle/>
+                    <a:p>
+                      <a:pPr algn="ctr">
+                        <a:buNone/>
+                      </a:pPr>
+                      <a:r>
+                        <a:rPr sz="1300" b="0">
+                          <a:solidFill>
+                            <a:srgbClr val="48484A"/>
+                          </a:solidFill>
+                          <a:latin typeface="Segoe UI Symbol"/>
+                        </a:rPr>
+                        <a:t>✗</a:t>
+                      </a:r>
+                    </a:p>
+                  </a:txBody>
+                  <a:tcPr marL="76200" marR="76200" marT="25400" marB="25400" anchor="ctr">
+                    <a:solidFill>
+                      <a:srgbClr val="08080C"/>
+                    </a:solidFill>
+                  </a:tcPr>
+                </a:tc>
+                <a:tc>
+                  <a:txBody>
+                    <a:bodyPr wrap="square"/>
+                    <a:lstStyle/>
+                    <a:p>
+                      <a:pPr algn="ctr">
+                        <a:buNone/>
+                      </a:pPr>
+                      <a:r>
+                        <a:rPr sz="1300" b="0">
+                          <a:solidFill>
+                            <a:srgbClr val="48484A"/>
+                          </a:solidFill>
+                          <a:latin typeface="Segoe UI Symbol"/>
+                        </a:rPr>
+                        <a:t>✗</a:t>
                       </a:r>
                     </a:p>
                   </a:txBody>
@@ -8453,6 +10228,56 @@
                     </a:solidFill>
                   </a:tcPr>
                 </a:tc>
+                <a:tc>
+                  <a:txBody>
+                    <a:bodyPr wrap="square"/>
+                    <a:lstStyle/>
+                    <a:p>
+                      <a:pPr algn="ctr">
+                        <a:buNone/>
+                      </a:pPr>
+                      <a:r>
+                        <a:rPr sz="1300" b="1">
+                          <a:solidFill>
+                            <a:srgbClr val="30D158"/>
+                          </a:solidFill>
+                          <a:latin typeface="Segoe UI Symbol"/>
+                        </a:rPr>
+                        <a:t>✗</a:t>
+                      </a:r>
+                    </a:p>
+                  </a:txBody>
+                  <a:tcPr marL="76200" marR="76200" marT="25400" marB="25400" anchor="ctr">
+                    <a:solidFill>
+                      <a:srgbClr val="2A1608"/>
+                    </a:solidFill>
+                  </a:tcPr>
+                </a:tc>
+                <a:tc>
+                  <a:txBody>
+                    <a:bodyPr wrap="square"/>
+                    <a:lstStyle/>
+                    <a:p>
+                      <a:pPr algn="ctr">
+                        <a:buNone/>
+                      </a:pPr>
+                      <a:r>
+                        <a:rPr sz="1300" b="1">
+                          <a:solidFill>
+                            <a:srgbClr val="30D158"/>
+                          </a:solidFill>
+                          <a:latin typeface="Segoe UI Symbol"/>
+                        </a:rPr>
+                        <a:t>✗</a:t>
+                      </a:r>
+                    </a:p>
+                  </a:txBody>
+                  <a:tcPr marL="76200" marR="76200" marT="25400" marB="25400" anchor="ctr">
+                    <a:solidFill>
+                      <a:srgbClr val="2A1608"/>
+                    </a:solidFill>
+                  </a:tcPr>
+                </a:tc>
               </a:tr>
             </a:tbl>
           </a:graphicData>
@@ -8928,7 +10753,7 @@
       </p:sp>
       <p:pic>
         <p:nvPicPr>
-          <p:cNvPr id="6" name="Picture 5" descr="p54-sesija-u-toku.png"/>
+          <p:cNvPr id="6" name="Picture 5" descr="p54-sesija-u-toku-0.045-0.030-0.000.png"/>
           <p:cNvPicPr>
             <a:picLocks noChangeAspect="1"/>
           </p:cNvPicPr>
@@ -9125,8 +10950,8 @@
         </p:nvSpPr>
         <p:spPr>
           <a:xfrm>
-            <a:off x="609600" y="1592580"/>
-            <a:ext cx="7101840" cy="4495800"/>
+            <a:off x="685800" y="1691640"/>
+            <a:ext cx="3172968" cy="2651760"/>
           </a:xfrm>
           <a:prstGeom prst="rect">
             <a:avLst/>
@@ -9163,40 +10988,16 @@
           </a:p>
         </p:txBody>
       </p:sp>
-      <p:pic>
-        <p:nvPicPr>
-          <p:cNvPr id="5" name="Picture 4" descr="dijagram-arhitektura.png"/>
-          <p:cNvPicPr>
-            <a:picLocks noChangeAspect="1"/>
-          </p:cNvPicPr>
-          <p:nvPr/>
-        </p:nvPicPr>
-        <p:blipFill>
-          <a:blip r:embed="rId2"/>
-          <a:stretch>
-            <a:fillRect/>
-          </a:stretch>
-        </p:blipFill>
-        <p:spPr>
-          <a:xfrm>
-            <a:off x="685800" y="1668780"/>
-            <a:ext cx="6949440" cy="4343400"/>
-          </a:xfrm>
-          <a:prstGeom prst="rect">
-            <a:avLst/>
-          </a:prstGeom>
-        </p:spPr>
-      </p:pic>
-      <p:sp>
-        <p:nvSpPr>
-          <p:cNvPr id="6" name="TextBox 5"/>
+      <p:sp>
+        <p:nvSpPr>
+          <p:cNvPr id="5" name="TextBox 4"/>
           <p:cNvSpPr txBox="1"/>
           <p:nvPr/>
         </p:nvSpPr>
         <p:spPr>
           <a:xfrm>
-            <a:off x="8001000" y="1783080"/>
-            <a:ext cx="3566160" cy="4206240"/>
+            <a:off x="886968" y="1837944"/>
+            <a:ext cx="2770632" cy="320040"/>
           </a:xfrm>
           <a:prstGeom prst="rect">
             <a:avLst/>
@@ -9209,154 +11010,1691 @@
           </a:bodyPr>
           <a:lstStyle/>
           <a:p>
-            <a:pPr marL="279400" indent="-279400">
-              <a:lnSpc>
-                <a:spcPct val="105000"/>
-              </a:lnSpc>
+            <a:pPr algn="ctr">
               <a:spcBef>
                 <a:spcPts val="0"/>
               </a:spcBef>
-              <a:buClr>
-                <a:srgbClr val="FF5500"/>
-              </a:buClr>
-              <a:buFont typeface="Arial"/>
-              <a:buChar char="▪"/>
-            </a:pPr>
-            <a:r>
-              <a:rPr sz="1700" b="0">
+              <a:buNone/>
+            </a:pPr>
+            <a:r>
+              <a:rPr sz="1500" b="1">
+                <a:solidFill>
+                  <a:srgbClr val="FF5500"/>
+                </a:solidFill>
+                <a:latin typeface="Arial"/>
+              </a:rPr>
+              <a:t>Client Interface</a:t>
+            </a:r>
+          </a:p>
+        </p:txBody>
+      </p:sp>
+      <p:sp>
+        <p:nvSpPr>
+          <p:cNvPr id="6" name="Rectangle 5"/>
+          <p:cNvSpPr/>
+          <p:nvPr/>
+        </p:nvSpPr>
+        <p:spPr>
+          <a:xfrm>
+            <a:off x="886968" y="2258568"/>
+            <a:ext cx="2770632" cy="420624"/>
+          </a:xfrm>
+          <a:prstGeom prst="rect">
+            <a:avLst/>
+          </a:prstGeom>
+          <a:solidFill>
+            <a:srgbClr val="202028"/>
+          </a:solidFill>
+          <a:ln w="9525">
+            <a:solidFill>
+              <a:srgbClr val="2A2A32"/>
+            </a:solidFill>
+          </a:ln>
+          <a:effectLst/>
+        </p:spPr>
+        <p:style>
+          <a:lnRef idx="1">
+            <a:schemeClr val="accent1"/>
+          </a:lnRef>
+          <a:fillRef idx="3">
+            <a:schemeClr val="accent1"/>
+          </a:fillRef>
+          <a:effectRef idx="2">
+            <a:schemeClr val="accent1"/>
+          </a:effectRef>
+          <a:fontRef idx="minor">
+            <a:schemeClr val="lt1"/>
+          </a:fontRef>
+        </p:style>
+        <p:txBody>
+          <a:bodyPr rtlCol="0" anchor="ctr"/>
+          <a:lstStyle/>
+          <a:p>
+            <a:pPr algn="ctr"/>
+          </a:p>
+        </p:txBody>
+      </p:sp>
+      <p:sp>
+        <p:nvSpPr>
+          <p:cNvPr id="7" name="TextBox 6"/>
+          <p:cNvSpPr txBox="1"/>
+          <p:nvPr/>
+        </p:nvSpPr>
+        <p:spPr>
+          <a:xfrm>
+            <a:off x="886968" y="2368296"/>
+            <a:ext cx="2770632" cy="274320"/>
+          </a:xfrm>
+          <a:prstGeom prst="rect">
+            <a:avLst/>
+          </a:prstGeom>
+          <a:noFill/>
+        </p:spPr>
+        <p:txBody>
+          <a:bodyPr wrap="square" lIns="0" rIns="0" tIns="0" bIns="0">
+            <a:spAutoFit/>
+          </a:bodyPr>
+          <a:lstStyle/>
+          <a:p>
+            <a:pPr algn="ctr">
+              <a:spcBef>
+                <a:spcPts val="0"/>
+              </a:spcBef>
+              <a:buNone/>
+            </a:pPr>
+            <a:r>
+              <a:rPr sz="1200" b="1">
                 <a:solidFill>
                   <a:srgbClr val="F2F2F7"/>
                 </a:solidFill>
                 <a:latin typeface="Arial"/>
               </a:rPr>
-              <a:t>Kotlin и Jetpack Compose</a:t>
-            </a:r>
-          </a:p>
-          <a:p>
-            <a:pPr marL="279400" indent="-279400">
-              <a:lnSpc>
-                <a:spcPct val="105000"/>
-              </a:lnSpc>
-              <a:spcBef>
-                <a:spcPts val="1300"/>
-              </a:spcBef>
-              <a:buClr>
-                <a:srgbClr val="FF5500"/>
-              </a:buClr>
-              <a:buFont typeface="Arial"/>
-              <a:buChar char="▪"/>
-            </a:pPr>
-            <a:r>
-              <a:rPr sz="1700" b="0">
+              <a:t>Jetpack Compose</a:t>
+            </a:r>
+          </a:p>
+        </p:txBody>
+      </p:sp>
+      <p:sp>
+        <p:nvSpPr>
+          <p:cNvPr id="8" name="Rectangle 7"/>
+          <p:cNvSpPr/>
+          <p:nvPr/>
+        </p:nvSpPr>
+        <p:spPr>
+          <a:xfrm>
+            <a:off x="886968" y="2770632"/>
+            <a:ext cx="2770632" cy="420624"/>
+          </a:xfrm>
+          <a:prstGeom prst="rect">
+            <a:avLst/>
+          </a:prstGeom>
+          <a:solidFill>
+            <a:srgbClr val="202028"/>
+          </a:solidFill>
+          <a:ln w="9525">
+            <a:solidFill>
+              <a:srgbClr val="2A2A32"/>
+            </a:solidFill>
+          </a:ln>
+          <a:effectLst/>
+        </p:spPr>
+        <p:style>
+          <a:lnRef idx="1">
+            <a:schemeClr val="accent1"/>
+          </a:lnRef>
+          <a:fillRef idx="3">
+            <a:schemeClr val="accent1"/>
+          </a:fillRef>
+          <a:effectRef idx="2">
+            <a:schemeClr val="accent1"/>
+          </a:effectRef>
+          <a:fontRef idx="minor">
+            <a:schemeClr val="lt1"/>
+          </a:fontRef>
+        </p:style>
+        <p:txBody>
+          <a:bodyPr rtlCol="0" anchor="ctr"/>
+          <a:lstStyle/>
+          <a:p>
+            <a:pPr algn="ctr"/>
+          </a:p>
+        </p:txBody>
+      </p:sp>
+      <p:sp>
+        <p:nvSpPr>
+          <p:cNvPr id="9" name="TextBox 8"/>
+          <p:cNvSpPr txBox="1"/>
+          <p:nvPr/>
+        </p:nvSpPr>
+        <p:spPr>
+          <a:xfrm>
+            <a:off x="886968" y="2880360"/>
+            <a:ext cx="2770632" cy="274320"/>
+          </a:xfrm>
+          <a:prstGeom prst="rect">
+            <a:avLst/>
+          </a:prstGeom>
+          <a:noFill/>
+        </p:spPr>
+        <p:txBody>
+          <a:bodyPr wrap="square" lIns="0" rIns="0" tIns="0" bIns="0">
+            <a:spAutoFit/>
+          </a:bodyPr>
+          <a:lstStyle/>
+          <a:p>
+            <a:pPr algn="ctr">
+              <a:spcBef>
+                <a:spcPts val="0"/>
+              </a:spcBef>
+              <a:buNone/>
+            </a:pPr>
+            <a:r>
+              <a:rPr sz="1200" b="1">
                 <a:solidFill>
                   <a:srgbClr val="F2F2F7"/>
                 </a:solidFill>
                 <a:latin typeface="Arial"/>
               </a:rPr>
-              <a:t>Hilt, Room и Retrofit</a:t>
-            </a:r>
-          </a:p>
-          <a:p>
-            <a:pPr marL="279400" indent="-279400">
-              <a:lnSpc>
-                <a:spcPct val="105000"/>
-              </a:lnSpc>
-              <a:spcBef>
-                <a:spcPts val="1300"/>
-              </a:spcBef>
-              <a:buClr>
-                <a:srgbClr val="FF5500"/>
-              </a:buClr>
-              <a:buFont typeface="Arial"/>
-              <a:buChar char="▪"/>
-            </a:pPr>
-            <a:r>
-              <a:rPr sz="1700" b="0">
+              <a:t>Material 3</a:t>
+            </a:r>
+          </a:p>
+        </p:txBody>
+      </p:sp>
+      <p:sp>
+        <p:nvSpPr>
+          <p:cNvPr id="10" name="Rectangle 9"/>
+          <p:cNvSpPr/>
+          <p:nvPr/>
+        </p:nvSpPr>
+        <p:spPr>
+          <a:xfrm>
+            <a:off x="886968" y="3282696"/>
+            <a:ext cx="2770632" cy="420624"/>
+          </a:xfrm>
+          <a:prstGeom prst="rect">
+            <a:avLst/>
+          </a:prstGeom>
+          <a:solidFill>
+            <a:srgbClr val="202028"/>
+          </a:solidFill>
+          <a:ln w="9525">
+            <a:solidFill>
+              <a:srgbClr val="2A2A32"/>
+            </a:solidFill>
+          </a:ln>
+          <a:effectLst/>
+        </p:spPr>
+        <p:style>
+          <a:lnRef idx="1">
+            <a:schemeClr val="accent1"/>
+          </a:lnRef>
+          <a:fillRef idx="3">
+            <a:schemeClr val="accent1"/>
+          </a:fillRef>
+          <a:effectRef idx="2">
+            <a:schemeClr val="accent1"/>
+          </a:effectRef>
+          <a:fontRef idx="minor">
+            <a:schemeClr val="lt1"/>
+          </a:fontRef>
+        </p:style>
+        <p:txBody>
+          <a:bodyPr rtlCol="0" anchor="ctr"/>
+          <a:lstStyle/>
+          <a:p>
+            <a:pPr algn="ctr"/>
+          </a:p>
+        </p:txBody>
+      </p:sp>
+      <p:sp>
+        <p:nvSpPr>
+          <p:cNvPr id="11" name="TextBox 10"/>
+          <p:cNvSpPr txBox="1"/>
+          <p:nvPr/>
+        </p:nvSpPr>
+        <p:spPr>
+          <a:xfrm>
+            <a:off x="886968" y="3392424"/>
+            <a:ext cx="2770632" cy="274320"/>
+          </a:xfrm>
+          <a:prstGeom prst="rect">
+            <a:avLst/>
+          </a:prstGeom>
+          <a:noFill/>
+        </p:spPr>
+        <p:txBody>
+          <a:bodyPr wrap="square" lIns="0" rIns="0" tIns="0" bIns="0">
+            <a:spAutoFit/>
+          </a:bodyPr>
+          <a:lstStyle/>
+          <a:p>
+            <a:pPr algn="ctr">
+              <a:spcBef>
+                <a:spcPts val="0"/>
+              </a:spcBef>
+              <a:buNone/>
+            </a:pPr>
+            <a:r>
+              <a:rPr sz="1200" b="1">
                 <a:solidFill>
                   <a:srgbClr val="F2F2F7"/>
                 </a:solidFill>
                 <a:latin typeface="Arial"/>
               </a:rPr>
-              <a:t>Сесију води сервис у предњем плану</a:t>
-            </a:r>
-          </a:p>
-          <a:p>
-            <a:pPr marL="533400" indent="-279400">
-              <a:lnSpc>
-                <a:spcPct val="105000"/>
-              </a:lnSpc>
-              <a:spcBef>
-                <a:spcPts val="500"/>
-              </a:spcBef>
-              <a:buClr>
-                <a:srgbClr val="48484A"/>
-              </a:buClr>
-              <a:buFont typeface="Arial"/>
-              <a:buChar char="–"/>
-            </a:pPr>
-            <a:r>
-              <a:rPr sz="1300" b="0">
+              <a:t>ViewModel</a:t>
+            </a:r>
+          </a:p>
+        </p:txBody>
+      </p:sp>
+      <p:sp>
+        <p:nvSpPr>
+          <p:cNvPr id="12" name="Rectangle 11"/>
+          <p:cNvSpPr/>
+          <p:nvPr/>
+        </p:nvSpPr>
+        <p:spPr>
+          <a:xfrm>
+            <a:off x="886968" y="3794760"/>
+            <a:ext cx="2770632" cy="420624"/>
+          </a:xfrm>
+          <a:prstGeom prst="rect">
+            <a:avLst/>
+          </a:prstGeom>
+          <a:solidFill>
+            <a:srgbClr val="202028"/>
+          </a:solidFill>
+          <a:ln w="9525">
+            <a:solidFill>
+              <a:srgbClr val="2A2A32"/>
+            </a:solidFill>
+          </a:ln>
+          <a:effectLst/>
+        </p:spPr>
+        <p:style>
+          <a:lnRef idx="1">
+            <a:schemeClr val="accent1"/>
+          </a:lnRef>
+          <a:fillRef idx="3">
+            <a:schemeClr val="accent1"/>
+          </a:fillRef>
+          <a:effectRef idx="2">
+            <a:schemeClr val="accent1"/>
+          </a:effectRef>
+          <a:fontRef idx="minor">
+            <a:schemeClr val="lt1"/>
+          </a:fontRef>
+        </p:style>
+        <p:txBody>
+          <a:bodyPr rtlCol="0" anchor="ctr"/>
+          <a:lstStyle/>
+          <a:p>
+            <a:pPr algn="ctr"/>
+          </a:p>
+        </p:txBody>
+      </p:sp>
+      <p:sp>
+        <p:nvSpPr>
+          <p:cNvPr id="13" name="TextBox 12"/>
+          <p:cNvSpPr txBox="1"/>
+          <p:nvPr/>
+        </p:nvSpPr>
+        <p:spPr>
+          <a:xfrm>
+            <a:off x="886968" y="3904488"/>
+            <a:ext cx="2770632" cy="274320"/>
+          </a:xfrm>
+          <a:prstGeom prst="rect">
+            <a:avLst/>
+          </a:prstGeom>
+          <a:noFill/>
+        </p:spPr>
+        <p:txBody>
+          <a:bodyPr wrap="square" lIns="0" rIns="0" tIns="0" bIns="0">
+            <a:spAutoFit/>
+          </a:bodyPr>
+          <a:lstStyle/>
+          <a:p>
+            <a:pPr algn="ctr">
+              <a:spcBef>
+                <a:spcPts val="0"/>
+              </a:spcBef>
+              <a:buNone/>
+            </a:pPr>
+            <a:r>
+              <a:rPr sz="1200" b="1">
+                <a:solidFill>
+                  <a:srgbClr val="F2F2F7"/>
+                </a:solidFill>
+                <a:latin typeface="Arial"/>
+              </a:rPr>
+              <a:t>Navigation Compose</a:t>
+            </a:r>
+          </a:p>
+        </p:txBody>
+      </p:sp>
+      <p:sp>
+        <p:nvSpPr>
+          <p:cNvPr id="14" name="Left-Right Arrow 13"/>
+          <p:cNvSpPr/>
+          <p:nvPr/>
+        </p:nvSpPr>
+        <p:spPr>
+          <a:xfrm>
+            <a:off x="3950208" y="2834640"/>
+            <a:ext cx="457200" cy="365760"/>
+          </a:xfrm>
+          <a:prstGeom prst="leftRightArrow">
+            <a:avLst/>
+          </a:prstGeom>
+          <a:solidFill>
+            <a:srgbClr val="FF5500"/>
+          </a:solidFill>
+          <a:ln>
+            <a:noFill/>
+          </a:ln>
+          <a:effectLst/>
+        </p:spPr>
+        <p:style>
+          <a:lnRef idx="1">
+            <a:schemeClr val="accent1"/>
+          </a:lnRef>
+          <a:fillRef idx="3">
+            <a:schemeClr val="accent1"/>
+          </a:fillRef>
+          <a:effectRef idx="2">
+            <a:schemeClr val="accent1"/>
+          </a:effectRef>
+          <a:fontRef idx="minor">
+            <a:schemeClr val="lt1"/>
+          </a:fontRef>
+        </p:style>
+        <p:txBody>
+          <a:bodyPr rtlCol="0" anchor="ctr"/>
+          <a:lstStyle/>
+          <a:p>
+            <a:pPr algn="ctr"/>
+          </a:p>
+        </p:txBody>
+      </p:sp>
+      <p:sp>
+        <p:nvSpPr>
+          <p:cNvPr id="15" name="Rectangle 14"/>
+          <p:cNvSpPr/>
+          <p:nvPr/>
+        </p:nvSpPr>
+        <p:spPr>
+          <a:xfrm>
+            <a:off x="4498848" y="1691640"/>
+            <a:ext cx="3172968" cy="2651760"/>
+          </a:xfrm>
+          <a:prstGeom prst="rect">
+            <a:avLst/>
+          </a:prstGeom>
+          <a:solidFill>
+            <a:srgbClr val="18181E"/>
+          </a:solidFill>
+          <a:ln w="9525">
+            <a:solidFill>
+              <a:srgbClr val="2A2A32"/>
+            </a:solidFill>
+          </a:ln>
+          <a:effectLst/>
+        </p:spPr>
+        <p:style>
+          <a:lnRef idx="1">
+            <a:schemeClr val="accent1"/>
+          </a:lnRef>
+          <a:fillRef idx="3">
+            <a:schemeClr val="accent1"/>
+          </a:fillRef>
+          <a:effectRef idx="2">
+            <a:schemeClr val="accent1"/>
+          </a:effectRef>
+          <a:fontRef idx="minor">
+            <a:schemeClr val="lt1"/>
+          </a:fontRef>
+        </p:style>
+        <p:txBody>
+          <a:bodyPr rtlCol="0" anchor="ctr"/>
+          <a:lstStyle/>
+          <a:p>
+            <a:pPr algn="ctr"/>
+          </a:p>
+        </p:txBody>
+      </p:sp>
+      <p:sp>
+        <p:nvSpPr>
+          <p:cNvPr id="16" name="TextBox 15"/>
+          <p:cNvSpPr txBox="1"/>
+          <p:nvPr/>
+        </p:nvSpPr>
+        <p:spPr>
+          <a:xfrm>
+            <a:off x="4700016" y="1837944"/>
+            <a:ext cx="2770632" cy="320040"/>
+          </a:xfrm>
+          <a:prstGeom prst="rect">
+            <a:avLst/>
+          </a:prstGeom>
+          <a:noFill/>
+        </p:spPr>
+        <p:txBody>
+          <a:bodyPr wrap="square" lIns="0" rIns="0" tIns="0" bIns="0">
+            <a:spAutoFit/>
+          </a:bodyPr>
+          <a:lstStyle/>
+          <a:p>
+            <a:pPr algn="ctr">
+              <a:spcBef>
+                <a:spcPts val="0"/>
+              </a:spcBef>
+              <a:buNone/>
+            </a:pPr>
+            <a:r>
+              <a:rPr sz="1500" b="1">
+                <a:solidFill>
+                  <a:srgbClr val="FF5500"/>
+                </a:solidFill>
+                <a:latin typeface="Arial"/>
+              </a:rPr>
+              <a:t>Business Logic</a:t>
+            </a:r>
+          </a:p>
+        </p:txBody>
+      </p:sp>
+      <p:sp>
+        <p:nvSpPr>
+          <p:cNvPr id="17" name="Rectangle 16"/>
+          <p:cNvSpPr/>
+          <p:nvPr/>
+        </p:nvSpPr>
+        <p:spPr>
+          <a:xfrm>
+            <a:off x="4700016" y="2258568"/>
+            <a:ext cx="2770632" cy="420624"/>
+          </a:xfrm>
+          <a:prstGeom prst="rect">
+            <a:avLst/>
+          </a:prstGeom>
+          <a:solidFill>
+            <a:srgbClr val="202028"/>
+          </a:solidFill>
+          <a:ln w="9525">
+            <a:solidFill>
+              <a:srgbClr val="2A2A32"/>
+            </a:solidFill>
+          </a:ln>
+          <a:effectLst/>
+        </p:spPr>
+        <p:style>
+          <a:lnRef idx="1">
+            <a:schemeClr val="accent1"/>
+          </a:lnRef>
+          <a:fillRef idx="3">
+            <a:schemeClr val="accent1"/>
+          </a:fillRef>
+          <a:effectRef idx="2">
+            <a:schemeClr val="accent1"/>
+          </a:effectRef>
+          <a:fontRef idx="minor">
+            <a:schemeClr val="lt1"/>
+          </a:fontRef>
+        </p:style>
+        <p:txBody>
+          <a:bodyPr rtlCol="0" anchor="ctr"/>
+          <a:lstStyle/>
+          <a:p>
+            <a:pPr algn="ctr"/>
+          </a:p>
+        </p:txBody>
+      </p:sp>
+      <p:sp>
+        <p:nvSpPr>
+          <p:cNvPr id="18" name="TextBox 17"/>
+          <p:cNvSpPr txBox="1"/>
+          <p:nvPr/>
+        </p:nvSpPr>
+        <p:spPr>
+          <a:xfrm>
+            <a:off x="4700016" y="2368296"/>
+            <a:ext cx="2770632" cy="274320"/>
+          </a:xfrm>
+          <a:prstGeom prst="rect">
+            <a:avLst/>
+          </a:prstGeom>
+          <a:noFill/>
+        </p:spPr>
+        <p:txBody>
+          <a:bodyPr wrap="square" lIns="0" rIns="0" tIns="0" bIns="0">
+            <a:spAutoFit/>
+          </a:bodyPr>
+          <a:lstStyle/>
+          <a:p>
+            <a:pPr algn="ctr">
+              <a:spcBef>
+                <a:spcPts val="0"/>
+              </a:spcBef>
+              <a:buNone/>
+            </a:pPr>
+            <a:r>
+              <a:rPr sz="1200" b="1">
+                <a:solidFill>
+                  <a:srgbClr val="F2F2F7"/>
+                </a:solidFill>
+                <a:latin typeface="Arial"/>
+              </a:rPr>
+              <a:t>SessionEngine</a:t>
+            </a:r>
+          </a:p>
+        </p:txBody>
+      </p:sp>
+      <p:sp>
+        <p:nvSpPr>
+          <p:cNvPr id="19" name="Rectangle 18"/>
+          <p:cNvSpPr/>
+          <p:nvPr/>
+        </p:nvSpPr>
+        <p:spPr>
+          <a:xfrm>
+            <a:off x="4700016" y="2770632"/>
+            <a:ext cx="2770632" cy="420624"/>
+          </a:xfrm>
+          <a:prstGeom prst="rect">
+            <a:avLst/>
+          </a:prstGeom>
+          <a:solidFill>
+            <a:srgbClr val="202028"/>
+          </a:solidFill>
+          <a:ln w="9525">
+            <a:solidFill>
+              <a:srgbClr val="2A2A32"/>
+            </a:solidFill>
+          </a:ln>
+          <a:effectLst/>
+        </p:spPr>
+        <p:style>
+          <a:lnRef idx="1">
+            <a:schemeClr val="accent1"/>
+          </a:lnRef>
+          <a:fillRef idx="3">
+            <a:schemeClr val="accent1"/>
+          </a:fillRef>
+          <a:effectRef idx="2">
+            <a:schemeClr val="accent1"/>
+          </a:effectRef>
+          <a:fontRef idx="minor">
+            <a:schemeClr val="lt1"/>
+          </a:fontRef>
+        </p:style>
+        <p:txBody>
+          <a:bodyPr rtlCol="0" anchor="ctr"/>
+          <a:lstStyle/>
+          <a:p>
+            <a:pPr algn="ctr"/>
+          </a:p>
+        </p:txBody>
+      </p:sp>
+      <p:sp>
+        <p:nvSpPr>
+          <p:cNvPr id="20" name="TextBox 19"/>
+          <p:cNvSpPr txBox="1"/>
+          <p:nvPr/>
+        </p:nvSpPr>
+        <p:spPr>
+          <a:xfrm>
+            <a:off x="4700016" y="2880360"/>
+            <a:ext cx="2770632" cy="274320"/>
+          </a:xfrm>
+          <a:prstGeom prst="rect">
+            <a:avLst/>
+          </a:prstGeom>
+          <a:noFill/>
+        </p:spPr>
+        <p:txBody>
+          <a:bodyPr wrap="square" lIns="0" rIns="0" tIns="0" bIns="0">
+            <a:spAutoFit/>
+          </a:bodyPr>
+          <a:lstStyle/>
+          <a:p>
+            <a:pPr algn="ctr">
+              <a:spcBef>
+                <a:spcPts val="0"/>
+              </a:spcBef>
+              <a:buNone/>
+            </a:pPr>
+            <a:r>
+              <a:rPr sz="1200" b="1">
+                <a:solidFill>
+                  <a:srgbClr val="F2F2F7"/>
+                </a:solidFill>
+                <a:latin typeface="Arial"/>
+              </a:rPr>
+              <a:t>EnvironmentMonitor</a:t>
+            </a:r>
+          </a:p>
+        </p:txBody>
+      </p:sp>
+      <p:sp>
+        <p:nvSpPr>
+          <p:cNvPr id="21" name="Rectangle 20"/>
+          <p:cNvSpPr/>
+          <p:nvPr/>
+        </p:nvSpPr>
+        <p:spPr>
+          <a:xfrm>
+            <a:off x="4700016" y="3282696"/>
+            <a:ext cx="2770632" cy="420624"/>
+          </a:xfrm>
+          <a:prstGeom prst="rect">
+            <a:avLst/>
+          </a:prstGeom>
+          <a:solidFill>
+            <a:srgbClr val="202028"/>
+          </a:solidFill>
+          <a:ln w="9525">
+            <a:solidFill>
+              <a:srgbClr val="2A2A32"/>
+            </a:solidFill>
+          </a:ln>
+          <a:effectLst/>
+        </p:spPr>
+        <p:style>
+          <a:lnRef idx="1">
+            <a:schemeClr val="accent1"/>
+          </a:lnRef>
+          <a:fillRef idx="3">
+            <a:schemeClr val="accent1"/>
+          </a:fillRef>
+          <a:effectRef idx="2">
+            <a:schemeClr val="accent1"/>
+          </a:effectRef>
+          <a:fontRef idx="minor">
+            <a:schemeClr val="lt1"/>
+          </a:fontRef>
+        </p:style>
+        <p:txBody>
+          <a:bodyPr rtlCol="0" anchor="ctr"/>
+          <a:lstStyle/>
+          <a:p>
+            <a:pPr algn="ctr"/>
+          </a:p>
+        </p:txBody>
+      </p:sp>
+      <p:sp>
+        <p:nvSpPr>
+          <p:cNvPr id="22" name="TextBox 21"/>
+          <p:cNvSpPr txBox="1"/>
+          <p:nvPr/>
+        </p:nvSpPr>
+        <p:spPr>
+          <a:xfrm>
+            <a:off x="4700016" y="3392424"/>
+            <a:ext cx="2770632" cy="274320"/>
+          </a:xfrm>
+          <a:prstGeom prst="rect">
+            <a:avLst/>
+          </a:prstGeom>
+          <a:noFill/>
+        </p:spPr>
+        <p:txBody>
+          <a:bodyPr wrap="square" lIns="0" rIns="0" tIns="0" bIns="0">
+            <a:spAutoFit/>
+          </a:bodyPr>
+          <a:lstStyle/>
+          <a:p>
+            <a:pPr algn="ctr">
+              <a:spcBef>
+                <a:spcPts val="0"/>
+              </a:spcBef>
+              <a:buNone/>
+            </a:pPr>
+            <a:r>
+              <a:rPr sz="1200" b="1">
+                <a:solidFill>
+                  <a:srgbClr val="F2F2F7"/>
+                </a:solidFill>
+                <a:latin typeface="Arial"/>
+              </a:rPr>
+              <a:t>Session rating</a:t>
+            </a:r>
+          </a:p>
+        </p:txBody>
+      </p:sp>
+      <p:sp>
+        <p:nvSpPr>
+          <p:cNvPr id="23" name="Rectangle 22"/>
+          <p:cNvSpPr/>
+          <p:nvPr/>
+        </p:nvSpPr>
+        <p:spPr>
+          <a:xfrm>
+            <a:off x="4700016" y="3794760"/>
+            <a:ext cx="2770632" cy="420624"/>
+          </a:xfrm>
+          <a:prstGeom prst="rect">
+            <a:avLst/>
+          </a:prstGeom>
+          <a:solidFill>
+            <a:srgbClr val="202028"/>
+          </a:solidFill>
+          <a:ln w="9525">
+            <a:solidFill>
+              <a:srgbClr val="2A2A32"/>
+            </a:solidFill>
+          </a:ln>
+          <a:effectLst/>
+        </p:spPr>
+        <p:style>
+          <a:lnRef idx="1">
+            <a:schemeClr val="accent1"/>
+          </a:lnRef>
+          <a:fillRef idx="3">
+            <a:schemeClr val="accent1"/>
+          </a:fillRef>
+          <a:effectRef idx="2">
+            <a:schemeClr val="accent1"/>
+          </a:effectRef>
+          <a:fontRef idx="minor">
+            <a:schemeClr val="lt1"/>
+          </a:fontRef>
+        </p:style>
+        <p:txBody>
+          <a:bodyPr rtlCol="0" anchor="ctr"/>
+          <a:lstStyle/>
+          <a:p>
+            <a:pPr algn="ctr"/>
+          </a:p>
+        </p:txBody>
+      </p:sp>
+      <p:sp>
+        <p:nvSpPr>
+          <p:cNvPr id="24" name="TextBox 23"/>
+          <p:cNvSpPr txBox="1"/>
+          <p:nvPr/>
+        </p:nvSpPr>
+        <p:spPr>
+          <a:xfrm>
+            <a:off x="4700016" y="3904488"/>
+            <a:ext cx="2770632" cy="274320"/>
+          </a:xfrm>
+          <a:prstGeom prst="rect">
+            <a:avLst/>
+          </a:prstGeom>
+          <a:noFill/>
+        </p:spPr>
+        <p:txBody>
+          <a:bodyPr wrap="square" lIns="0" rIns="0" tIns="0" bIns="0">
+            <a:spAutoFit/>
+          </a:bodyPr>
+          <a:lstStyle/>
+          <a:p>
+            <a:pPr algn="ctr">
+              <a:spcBef>
+                <a:spcPts val="0"/>
+              </a:spcBef>
+              <a:buNone/>
+            </a:pPr>
+            <a:r>
+              <a:rPr sz="1200" b="1">
+                <a:solidFill>
+                  <a:srgbClr val="F2F2F7"/>
+                </a:solidFill>
+                <a:latin typeface="Arial"/>
+              </a:rPr>
+              <a:t>Hilt</a:t>
+            </a:r>
+          </a:p>
+        </p:txBody>
+      </p:sp>
+      <p:sp>
+        <p:nvSpPr>
+          <p:cNvPr id="25" name="Left-Right Arrow 24"/>
+          <p:cNvSpPr/>
+          <p:nvPr/>
+        </p:nvSpPr>
+        <p:spPr>
+          <a:xfrm>
+            <a:off x="7763256" y="2834640"/>
+            <a:ext cx="457200" cy="365760"/>
+          </a:xfrm>
+          <a:prstGeom prst="leftRightArrow">
+            <a:avLst/>
+          </a:prstGeom>
+          <a:solidFill>
+            <a:srgbClr val="FF5500"/>
+          </a:solidFill>
+          <a:ln>
+            <a:noFill/>
+          </a:ln>
+          <a:effectLst/>
+        </p:spPr>
+        <p:style>
+          <a:lnRef idx="1">
+            <a:schemeClr val="accent1"/>
+          </a:lnRef>
+          <a:fillRef idx="3">
+            <a:schemeClr val="accent1"/>
+          </a:fillRef>
+          <a:effectRef idx="2">
+            <a:schemeClr val="accent1"/>
+          </a:effectRef>
+          <a:fontRef idx="minor">
+            <a:schemeClr val="lt1"/>
+          </a:fontRef>
+        </p:style>
+        <p:txBody>
+          <a:bodyPr rtlCol="0" anchor="ctr"/>
+          <a:lstStyle/>
+          <a:p>
+            <a:pPr algn="ctr"/>
+          </a:p>
+        </p:txBody>
+      </p:sp>
+      <p:sp>
+        <p:nvSpPr>
+          <p:cNvPr id="26" name="Rectangle 25"/>
+          <p:cNvSpPr/>
+          <p:nvPr/>
+        </p:nvSpPr>
+        <p:spPr>
+          <a:xfrm>
+            <a:off x="8311896" y="1691640"/>
+            <a:ext cx="3172968" cy="2651760"/>
+          </a:xfrm>
+          <a:prstGeom prst="rect">
+            <a:avLst/>
+          </a:prstGeom>
+          <a:solidFill>
+            <a:srgbClr val="18181E"/>
+          </a:solidFill>
+          <a:ln w="9525">
+            <a:solidFill>
+              <a:srgbClr val="2A2A32"/>
+            </a:solidFill>
+          </a:ln>
+          <a:effectLst/>
+        </p:spPr>
+        <p:style>
+          <a:lnRef idx="1">
+            <a:schemeClr val="accent1"/>
+          </a:lnRef>
+          <a:fillRef idx="3">
+            <a:schemeClr val="accent1"/>
+          </a:fillRef>
+          <a:effectRef idx="2">
+            <a:schemeClr val="accent1"/>
+          </a:effectRef>
+          <a:fontRef idx="minor">
+            <a:schemeClr val="lt1"/>
+          </a:fontRef>
+        </p:style>
+        <p:txBody>
+          <a:bodyPr rtlCol="0" anchor="ctr"/>
+          <a:lstStyle/>
+          <a:p>
+            <a:pPr algn="ctr"/>
+          </a:p>
+        </p:txBody>
+      </p:sp>
+      <p:sp>
+        <p:nvSpPr>
+          <p:cNvPr id="27" name="TextBox 26"/>
+          <p:cNvSpPr txBox="1"/>
+          <p:nvPr/>
+        </p:nvSpPr>
+        <p:spPr>
+          <a:xfrm>
+            <a:off x="8513064" y="1837944"/>
+            <a:ext cx="2770632" cy="320040"/>
+          </a:xfrm>
+          <a:prstGeom prst="rect">
+            <a:avLst/>
+          </a:prstGeom>
+          <a:noFill/>
+        </p:spPr>
+        <p:txBody>
+          <a:bodyPr wrap="square" lIns="0" rIns="0" tIns="0" bIns="0">
+            <a:spAutoFit/>
+          </a:bodyPr>
+          <a:lstStyle/>
+          <a:p>
+            <a:pPr algn="ctr">
+              <a:spcBef>
+                <a:spcPts val="0"/>
+              </a:spcBef>
+              <a:buNone/>
+            </a:pPr>
+            <a:r>
+              <a:rPr sz="1500" b="1">
+                <a:solidFill>
+                  <a:srgbClr val="FF5500"/>
+                </a:solidFill>
+                <a:latin typeface="Arial"/>
+              </a:rPr>
+              <a:t>Data</a:t>
+            </a:r>
+          </a:p>
+        </p:txBody>
+      </p:sp>
+      <p:sp>
+        <p:nvSpPr>
+          <p:cNvPr id="28" name="Rectangle 27"/>
+          <p:cNvSpPr/>
+          <p:nvPr/>
+        </p:nvSpPr>
+        <p:spPr>
+          <a:xfrm>
+            <a:off x="8513064" y="2258568"/>
+            <a:ext cx="2770632" cy="420624"/>
+          </a:xfrm>
+          <a:prstGeom prst="rect">
+            <a:avLst/>
+          </a:prstGeom>
+          <a:solidFill>
+            <a:srgbClr val="202028"/>
+          </a:solidFill>
+          <a:ln w="9525">
+            <a:solidFill>
+              <a:srgbClr val="2A2A32"/>
+            </a:solidFill>
+          </a:ln>
+          <a:effectLst/>
+        </p:spPr>
+        <p:style>
+          <a:lnRef idx="1">
+            <a:schemeClr val="accent1"/>
+          </a:lnRef>
+          <a:fillRef idx="3">
+            <a:schemeClr val="accent1"/>
+          </a:fillRef>
+          <a:effectRef idx="2">
+            <a:schemeClr val="accent1"/>
+          </a:effectRef>
+          <a:fontRef idx="minor">
+            <a:schemeClr val="lt1"/>
+          </a:fontRef>
+        </p:style>
+        <p:txBody>
+          <a:bodyPr rtlCol="0" anchor="ctr"/>
+          <a:lstStyle/>
+          <a:p>
+            <a:pPr algn="ctr"/>
+          </a:p>
+        </p:txBody>
+      </p:sp>
+      <p:sp>
+        <p:nvSpPr>
+          <p:cNvPr id="29" name="TextBox 28"/>
+          <p:cNvSpPr txBox="1"/>
+          <p:nvPr/>
+        </p:nvSpPr>
+        <p:spPr>
+          <a:xfrm>
+            <a:off x="8513064" y="2368296"/>
+            <a:ext cx="2770632" cy="274320"/>
+          </a:xfrm>
+          <a:prstGeom prst="rect">
+            <a:avLst/>
+          </a:prstGeom>
+          <a:noFill/>
+        </p:spPr>
+        <p:txBody>
+          <a:bodyPr wrap="square" lIns="0" rIns="0" tIns="0" bIns="0">
+            <a:spAutoFit/>
+          </a:bodyPr>
+          <a:lstStyle/>
+          <a:p>
+            <a:pPr algn="ctr">
+              <a:spcBef>
+                <a:spcPts val="0"/>
+              </a:spcBef>
+              <a:buNone/>
+            </a:pPr>
+            <a:r>
+              <a:rPr sz="1200" b="1">
+                <a:solidFill>
+                  <a:srgbClr val="F2F2F7"/>
+                </a:solidFill>
+                <a:latin typeface="Arial"/>
+              </a:rPr>
+              <a:t>Repositories</a:t>
+            </a:r>
+          </a:p>
+        </p:txBody>
+      </p:sp>
+      <p:sp>
+        <p:nvSpPr>
+          <p:cNvPr id="30" name="Rectangle 29"/>
+          <p:cNvSpPr/>
+          <p:nvPr/>
+        </p:nvSpPr>
+        <p:spPr>
+          <a:xfrm>
+            <a:off x="8513064" y="2770632"/>
+            <a:ext cx="2770632" cy="420624"/>
+          </a:xfrm>
+          <a:prstGeom prst="rect">
+            <a:avLst/>
+          </a:prstGeom>
+          <a:solidFill>
+            <a:srgbClr val="202028"/>
+          </a:solidFill>
+          <a:ln w="9525">
+            <a:solidFill>
+              <a:srgbClr val="2A2A32"/>
+            </a:solidFill>
+          </a:ln>
+          <a:effectLst/>
+        </p:spPr>
+        <p:style>
+          <a:lnRef idx="1">
+            <a:schemeClr val="accent1"/>
+          </a:lnRef>
+          <a:fillRef idx="3">
+            <a:schemeClr val="accent1"/>
+          </a:fillRef>
+          <a:effectRef idx="2">
+            <a:schemeClr val="accent1"/>
+          </a:effectRef>
+          <a:fontRef idx="minor">
+            <a:schemeClr val="lt1"/>
+          </a:fontRef>
+        </p:style>
+        <p:txBody>
+          <a:bodyPr rtlCol="0" anchor="ctr"/>
+          <a:lstStyle/>
+          <a:p>
+            <a:pPr algn="ctr"/>
+          </a:p>
+        </p:txBody>
+      </p:sp>
+      <p:sp>
+        <p:nvSpPr>
+          <p:cNvPr id="31" name="TextBox 30"/>
+          <p:cNvSpPr txBox="1"/>
+          <p:nvPr/>
+        </p:nvSpPr>
+        <p:spPr>
+          <a:xfrm>
+            <a:off x="8513064" y="2880360"/>
+            <a:ext cx="2770632" cy="274320"/>
+          </a:xfrm>
+          <a:prstGeom prst="rect">
+            <a:avLst/>
+          </a:prstGeom>
+          <a:noFill/>
+        </p:spPr>
+        <p:txBody>
+          <a:bodyPr wrap="square" lIns="0" rIns="0" tIns="0" bIns="0">
+            <a:spAutoFit/>
+          </a:bodyPr>
+          <a:lstStyle/>
+          <a:p>
+            <a:pPr algn="ctr">
+              <a:spcBef>
+                <a:spcPts val="0"/>
+              </a:spcBef>
+              <a:buNone/>
+            </a:pPr>
+            <a:r>
+              <a:rPr sz="1200" b="1">
+                <a:solidFill>
+                  <a:srgbClr val="F2F2F7"/>
+                </a:solidFill>
+                <a:latin typeface="Arial"/>
+              </a:rPr>
+              <a:t>Room / SQLite</a:t>
+            </a:r>
+          </a:p>
+        </p:txBody>
+      </p:sp>
+      <p:sp>
+        <p:nvSpPr>
+          <p:cNvPr id="32" name="Rectangle 31"/>
+          <p:cNvSpPr/>
+          <p:nvPr/>
+        </p:nvSpPr>
+        <p:spPr>
+          <a:xfrm>
+            <a:off x="8513064" y="3282696"/>
+            <a:ext cx="2770632" cy="420624"/>
+          </a:xfrm>
+          <a:prstGeom prst="rect">
+            <a:avLst/>
+          </a:prstGeom>
+          <a:solidFill>
+            <a:srgbClr val="202028"/>
+          </a:solidFill>
+          <a:ln w="9525">
+            <a:solidFill>
+              <a:srgbClr val="2A2A32"/>
+            </a:solidFill>
+          </a:ln>
+          <a:effectLst/>
+        </p:spPr>
+        <p:style>
+          <a:lnRef idx="1">
+            <a:schemeClr val="accent1"/>
+          </a:lnRef>
+          <a:fillRef idx="3">
+            <a:schemeClr val="accent1"/>
+          </a:fillRef>
+          <a:effectRef idx="2">
+            <a:schemeClr val="accent1"/>
+          </a:effectRef>
+          <a:fontRef idx="minor">
+            <a:schemeClr val="lt1"/>
+          </a:fontRef>
+        </p:style>
+        <p:txBody>
+          <a:bodyPr rtlCol="0" anchor="ctr"/>
+          <a:lstStyle/>
+          <a:p>
+            <a:pPr algn="ctr"/>
+          </a:p>
+        </p:txBody>
+      </p:sp>
+      <p:sp>
+        <p:nvSpPr>
+          <p:cNvPr id="33" name="TextBox 32"/>
+          <p:cNvSpPr txBox="1"/>
+          <p:nvPr/>
+        </p:nvSpPr>
+        <p:spPr>
+          <a:xfrm>
+            <a:off x="8513064" y="3392424"/>
+            <a:ext cx="2770632" cy="274320"/>
+          </a:xfrm>
+          <a:prstGeom prst="rect">
+            <a:avLst/>
+          </a:prstGeom>
+          <a:noFill/>
+        </p:spPr>
+        <p:txBody>
+          <a:bodyPr wrap="square" lIns="0" rIns="0" tIns="0" bIns="0">
+            <a:spAutoFit/>
+          </a:bodyPr>
+          <a:lstStyle/>
+          <a:p>
+            <a:pPr algn="ctr">
+              <a:spcBef>
+                <a:spcPts val="0"/>
+              </a:spcBef>
+              <a:buNone/>
+            </a:pPr>
+            <a:r>
+              <a:rPr sz="1200" b="1">
+                <a:solidFill>
+                  <a:srgbClr val="F2F2F7"/>
+                </a:solidFill>
+                <a:latin typeface="Arial"/>
+              </a:rPr>
+              <a:t>Retrofit</a:t>
+            </a:r>
+          </a:p>
+        </p:txBody>
+      </p:sp>
+      <p:sp>
+        <p:nvSpPr>
+          <p:cNvPr id="34" name="Up Arrow 33"/>
+          <p:cNvSpPr/>
+          <p:nvPr/>
+        </p:nvSpPr>
+        <p:spPr>
+          <a:xfrm>
+            <a:off x="5939028" y="4370832"/>
+            <a:ext cx="292608" cy="310896"/>
+          </a:xfrm>
+          <a:prstGeom prst="upArrow">
+            <a:avLst/>
+          </a:prstGeom>
+          <a:solidFill>
+            <a:srgbClr val="FF5500"/>
+          </a:solidFill>
+          <a:ln>
+            <a:noFill/>
+          </a:ln>
+          <a:effectLst/>
+        </p:spPr>
+        <p:style>
+          <a:lnRef idx="1">
+            <a:schemeClr val="accent1"/>
+          </a:lnRef>
+          <a:fillRef idx="3">
+            <a:schemeClr val="accent1"/>
+          </a:fillRef>
+          <a:effectRef idx="2">
+            <a:schemeClr val="accent1"/>
+          </a:effectRef>
+          <a:fontRef idx="minor">
+            <a:schemeClr val="lt1"/>
+          </a:fontRef>
+        </p:style>
+        <p:txBody>
+          <a:bodyPr rtlCol="0" anchor="ctr"/>
+          <a:lstStyle/>
+          <a:p>
+            <a:pPr algn="ctr"/>
+          </a:p>
+        </p:txBody>
+      </p:sp>
+      <p:sp>
+        <p:nvSpPr>
+          <p:cNvPr id="35" name="Down Arrow 34"/>
+          <p:cNvSpPr/>
+          <p:nvPr/>
+        </p:nvSpPr>
+        <p:spPr>
+          <a:xfrm>
+            <a:off x="9550908" y="4370832"/>
+            <a:ext cx="292608" cy="310896"/>
+          </a:xfrm>
+          <a:prstGeom prst="downArrow">
+            <a:avLst/>
+          </a:prstGeom>
+          <a:solidFill>
+            <a:srgbClr val="FF5500"/>
+          </a:solidFill>
+          <a:ln>
+            <a:noFill/>
+          </a:ln>
+          <a:effectLst/>
+        </p:spPr>
+        <p:style>
+          <a:lnRef idx="1">
+            <a:schemeClr val="accent1"/>
+          </a:lnRef>
+          <a:fillRef idx="3">
+            <a:schemeClr val="accent1"/>
+          </a:fillRef>
+          <a:effectRef idx="2">
+            <a:schemeClr val="accent1"/>
+          </a:effectRef>
+          <a:fontRef idx="minor">
+            <a:schemeClr val="lt1"/>
+          </a:fontRef>
+        </p:style>
+        <p:txBody>
+          <a:bodyPr rtlCol="0" anchor="ctr"/>
+          <a:lstStyle/>
+          <a:p>
+            <a:pPr algn="ctr"/>
+          </a:p>
+        </p:txBody>
+      </p:sp>
+      <p:sp>
+        <p:nvSpPr>
+          <p:cNvPr id="36" name="Up Arrow 35"/>
+          <p:cNvSpPr/>
+          <p:nvPr/>
+        </p:nvSpPr>
+        <p:spPr>
+          <a:xfrm>
+            <a:off x="9953244" y="4370832"/>
+            <a:ext cx="292608" cy="310896"/>
+          </a:xfrm>
+          <a:prstGeom prst="upArrow">
+            <a:avLst/>
+          </a:prstGeom>
+          <a:solidFill>
+            <a:srgbClr val="FF5500"/>
+          </a:solidFill>
+          <a:ln>
+            <a:noFill/>
+          </a:ln>
+          <a:effectLst/>
+        </p:spPr>
+        <p:style>
+          <a:lnRef idx="1">
+            <a:schemeClr val="accent1"/>
+          </a:lnRef>
+          <a:fillRef idx="3">
+            <a:schemeClr val="accent1"/>
+          </a:fillRef>
+          <a:effectRef idx="2">
+            <a:schemeClr val="accent1"/>
+          </a:effectRef>
+          <a:fontRef idx="minor">
+            <a:schemeClr val="lt1"/>
+          </a:fontRef>
+        </p:style>
+        <p:txBody>
+          <a:bodyPr rtlCol="0" anchor="ctr"/>
+          <a:lstStyle/>
+          <a:p>
+            <a:pPr algn="ctr"/>
+          </a:p>
+        </p:txBody>
+      </p:sp>
+      <p:sp>
+        <p:nvSpPr>
+          <p:cNvPr id="37" name="TextBox 36"/>
+          <p:cNvSpPr txBox="1"/>
+          <p:nvPr/>
+        </p:nvSpPr>
+        <p:spPr>
+          <a:xfrm>
+            <a:off x="8755380" y="4407408"/>
+            <a:ext cx="731520" cy="228600"/>
+          </a:xfrm>
+          <a:prstGeom prst="rect">
+            <a:avLst/>
+          </a:prstGeom>
+          <a:noFill/>
+        </p:spPr>
+        <p:txBody>
+          <a:bodyPr wrap="square" lIns="0" rIns="0" tIns="0" bIns="0">
+            <a:spAutoFit/>
+          </a:bodyPr>
+          <a:lstStyle/>
+          <a:p>
+            <a:pPr algn="r">
+              <a:spcBef>
+                <a:spcPts val="0"/>
+              </a:spcBef>
+              <a:buNone/>
+            </a:pPr>
+            <a:r>
+              <a:rPr sz="1000" b="0">
                 <a:solidFill>
                   <a:srgbClr val="8E8E93"/>
                 </a:solidFill>
                 <a:latin typeface="Arial"/>
               </a:rPr>
-              <a:t>рад се наставља и кад се апликација напусти</a:t>
-            </a:r>
-          </a:p>
-          <a:p>
-            <a:pPr marL="279400" indent="-279400">
-              <a:lnSpc>
-                <a:spcPct val="105000"/>
-              </a:lnSpc>
-              <a:spcBef>
-                <a:spcPts val="1300"/>
-              </a:spcBef>
-              <a:buClr>
-                <a:srgbClr val="FF5500"/>
-              </a:buClr>
-              <a:buFont typeface="Arial"/>
-              <a:buChar char="▪"/>
-            </a:pPr>
-            <a:r>
-              <a:rPr sz="1700" b="0">
+              <a:t>HTTPS</a:t>
+            </a:r>
+          </a:p>
+        </p:txBody>
+      </p:sp>
+      <p:sp>
+        <p:nvSpPr>
+          <p:cNvPr id="38" name="TextBox 37"/>
+          <p:cNvSpPr txBox="1"/>
+          <p:nvPr/>
+        </p:nvSpPr>
+        <p:spPr>
+          <a:xfrm>
+            <a:off x="10309860" y="4407408"/>
+            <a:ext cx="731520" cy="228600"/>
+          </a:xfrm>
+          <a:prstGeom prst="rect">
+            <a:avLst/>
+          </a:prstGeom>
+          <a:noFill/>
+        </p:spPr>
+        <p:txBody>
+          <a:bodyPr wrap="square" lIns="0" rIns="0" tIns="0" bIns="0">
+            <a:spAutoFit/>
+          </a:bodyPr>
+          <a:lstStyle/>
+          <a:p>
+            <a:pPr>
+              <a:spcBef>
+                <a:spcPts val="0"/>
+              </a:spcBef>
+              <a:buNone/>
+            </a:pPr>
+            <a:r>
+              <a:rPr sz="1000" b="0">
+                <a:solidFill>
+                  <a:srgbClr val="8E8E93"/>
+                </a:solidFill>
+                <a:latin typeface="Arial"/>
+              </a:rPr>
+              <a:t>JSON</a:t>
+            </a:r>
+          </a:p>
+        </p:txBody>
+      </p:sp>
+      <p:sp>
+        <p:nvSpPr>
+          <p:cNvPr id="39" name="Rectangle 38"/>
+          <p:cNvSpPr/>
+          <p:nvPr/>
+        </p:nvSpPr>
+        <p:spPr>
+          <a:xfrm>
+            <a:off x="685800" y="4709160"/>
+            <a:ext cx="6986016" cy="749808"/>
+          </a:xfrm>
+          <a:prstGeom prst="rect">
+            <a:avLst/>
+          </a:prstGeom>
+          <a:solidFill>
+            <a:srgbClr val="18181E"/>
+          </a:solidFill>
+          <a:ln w="9525">
+            <a:solidFill>
+              <a:srgbClr val="2A2A32"/>
+            </a:solidFill>
+          </a:ln>
+          <a:effectLst/>
+        </p:spPr>
+        <p:style>
+          <a:lnRef idx="1">
+            <a:schemeClr val="accent1"/>
+          </a:lnRef>
+          <a:fillRef idx="3">
+            <a:schemeClr val="accent1"/>
+          </a:fillRef>
+          <a:effectRef idx="2">
+            <a:schemeClr val="accent1"/>
+          </a:effectRef>
+          <a:fontRef idx="minor">
+            <a:schemeClr val="lt1"/>
+          </a:fontRef>
+        </p:style>
+        <p:txBody>
+          <a:bodyPr rtlCol="0" anchor="ctr"/>
+          <a:lstStyle/>
+          <a:p>
+            <a:pPr algn="ctr"/>
+          </a:p>
+        </p:txBody>
+      </p:sp>
+      <p:sp>
+        <p:nvSpPr>
+          <p:cNvPr id="40" name="TextBox 39"/>
+          <p:cNvSpPr txBox="1"/>
+          <p:nvPr/>
+        </p:nvSpPr>
+        <p:spPr>
+          <a:xfrm>
+            <a:off x="886968" y="4837176"/>
+            <a:ext cx="6583680" cy="548640"/>
+          </a:xfrm>
+          <a:prstGeom prst="rect">
+            <a:avLst/>
+          </a:prstGeom>
+          <a:noFill/>
+        </p:spPr>
+        <p:txBody>
+          <a:bodyPr wrap="square" lIns="0" rIns="0" tIns="0" bIns="0">
+            <a:spAutoFit/>
+          </a:bodyPr>
+          <a:lstStyle/>
+          <a:p>
+            <a:pPr algn="ctr">
+              <a:spcBef>
+                <a:spcPts val="0"/>
+              </a:spcBef>
+              <a:buNone/>
+            </a:pPr>
+            <a:r>
+              <a:rPr sz="1300" b="1">
+                <a:solidFill>
+                  <a:srgbClr val="FF5500"/>
+                </a:solidFill>
+                <a:latin typeface="Arial"/>
+              </a:rPr>
+              <a:t>Android Platform</a:t>
+            </a:r>
+          </a:p>
+          <a:p>
+            <a:pPr algn="ctr">
+              <a:spcBef>
+                <a:spcPts val="400"/>
+              </a:spcBef>
+              <a:buNone/>
+            </a:pPr>
+            <a:r>
+              <a:rPr sz="1100" b="0">
+                <a:solidFill>
+                  <a:srgbClr val="8E8E93"/>
+                </a:solidFill>
+                <a:latin typeface="Arial"/>
+              </a:rPr>
+              <a:t>foreground service  ·  AlarmManager  ·  sensors  ·  microphone</a:t>
+            </a:r>
+          </a:p>
+        </p:txBody>
+      </p:sp>
+      <p:sp>
+        <p:nvSpPr>
+          <p:cNvPr id="41" name="Rectangle 40"/>
+          <p:cNvSpPr/>
+          <p:nvPr/>
+        </p:nvSpPr>
+        <p:spPr>
+          <a:xfrm>
+            <a:off x="8311896" y="4709160"/>
+            <a:ext cx="3172968" cy="749808"/>
+          </a:xfrm>
+          <a:prstGeom prst="rect">
+            <a:avLst/>
+          </a:prstGeom>
+          <a:solidFill>
+            <a:srgbClr val="2A1608"/>
+          </a:solidFill>
+          <a:ln w="9525">
+            <a:solidFill>
+              <a:srgbClr val="FF5500"/>
+            </a:solidFill>
+          </a:ln>
+          <a:effectLst/>
+        </p:spPr>
+        <p:style>
+          <a:lnRef idx="1">
+            <a:schemeClr val="accent1"/>
+          </a:lnRef>
+          <a:fillRef idx="3">
+            <a:schemeClr val="accent1"/>
+          </a:fillRef>
+          <a:effectRef idx="2">
+            <a:schemeClr val="accent1"/>
+          </a:effectRef>
+          <a:fontRef idx="minor">
+            <a:schemeClr val="lt1"/>
+          </a:fontRef>
+        </p:style>
+        <p:txBody>
+          <a:bodyPr rtlCol="0" anchor="ctr"/>
+          <a:lstStyle/>
+          <a:p>
+            <a:pPr algn="ctr"/>
+          </a:p>
+        </p:txBody>
+      </p:sp>
+      <p:sp>
+        <p:nvSpPr>
+          <p:cNvPr id="42" name="TextBox 41"/>
+          <p:cNvSpPr txBox="1"/>
+          <p:nvPr/>
+        </p:nvSpPr>
+        <p:spPr>
+          <a:xfrm>
+            <a:off x="8513064" y="4837176"/>
+            <a:ext cx="2770632" cy="548640"/>
+          </a:xfrm>
+          <a:prstGeom prst="rect">
+            <a:avLst/>
+          </a:prstGeom>
+          <a:noFill/>
+        </p:spPr>
+        <p:txBody>
+          <a:bodyPr wrap="square" lIns="0" rIns="0" tIns="0" bIns="0">
+            <a:spAutoFit/>
+          </a:bodyPr>
+          <a:lstStyle/>
+          <a:p>
+            <a:pPr algn="ctr">
+              <a:spcBef>
+                <a:spcPts val="0"/>
+              </a:spcBef>
+              <a:buNone/>
+            </a:pPr>
+            <a:r>
+              <a:rPr sz="1300" b="1">
                 <a:solidFill>
                   <a:srgbClr val="F2F2F7"/>
                 </a:solidFill>
                 <a:latin typeface="Arial"/>
               </a:rPr>
-              <a:t>Стање се изводи из временских ознака</a:t>
-            </a:r>
-          </a:p>
-          <a:p>
-            <a:pPr marL="533400" indent="-279400">
-              <a:lnSpc>
-                <a:spcPct val="105000"/>
-              </a:lnSpc>
-              <a:spcBef>
-                <a:spcPts val="500"/>
-              </a:spcBef>
-              <a:buClr>
-                <a:srgbClr val="48484A"/>
-              </a:buClr>
-              <a:buFont typeface="Arial"/>
-              <a:buChar char="–"/>
-            </a:pPr>
-            <a:r>
-              <a:rPr sz="1300" b="0">
+              <a:t>Gemini API</a:t>
+            </a:r>
+          </a:p>
+          <a:p>
+            <a:pPr algn="ctr">
+              <a:spcBef>
+                <a:spcPts val="400"/>
+              </a:spcBef>
+              <a:buNone/>
+            </a:pPr>
+            <a:r>
+              <a:rPr sz="1100" b="0">
                 <a:solidFill>
                   <a:srgbClr val="8E8E93"/>
                 </a:solidFill>
                 <a:latin typeface="Arial"/>
               </a:rPr>
-              <a:t>изостанак откуцаја не помера сат</a:t>
-            </a:r>
-          </a:p>
-        </p:txBody>
-      </p:sp>
-      <p:sp>
-        <p:nvSpPr>
-          <p:cNvPr id="7" name="TextBox 6"/>
+              <a:t>туђа услуга, ван апликације</a:t>
+            </a:r>
+          </a:p>
+        </p:txBody>
+      </p:sp>
+      <p:sp>
+        <p:nvSpPr>
+          <p:cNvPr id="43" name="TextBox 42"/>
+          <p:cNvSpPr txBox="1"/>
+          <p:nvPr/>
+        </p:nvSpPr>
+        <p:spPr>
+          <a:xfrm>
+            <a:off x="685800" y="5806440"/>
+            <a:ext cx="10820095" cy="365760"/>
+          </a:xfrm>
+          <a:prstGeom prst="rect">
+            <a:avLst/>
+          </a:prstGeom>
+          <a:noFill/>
+        </p:spPr>
+        <p:txBody>
+          <a:bodyPr wrap="square" lIns="0" rIns="0" tIns="0" bIns="0">
+            <a:spAutoFit/>
+          </a:bodyPr>
+          <a:lstStyle/>
+          <a:p>
+            <a:pPr>
+              <a:spcBef>
+                <a:spcPts val="0"/>
+              </a:spcBef>
+              <a:buNone/>
+            </a:pPr>
+            <a:r>
+              <a:rPr sz="1500" b="0">
+                <a:solidFill>
+                  <a:srgbClr val="FF5500"/>
+                </a:solidFill>
+                <a:latin typeface="Arial"/>
+              </a:rPr>
+              <a:t>Апликација нема свој сервер: једина мрежна веза је позив за оцену, а сви подаци остају на уређају.</a:t>
+            </a:r>
+          </a:p>
+        </p:txBody>
+      </p:sp>
+      <p:sp>
+        <p:nvSpPr>
+          <p:cNvPr id="44" name="TextBox 43"/>
           <p:cNvSpPr txBox="1"/>
           <p:nvPr/>
         </p:nvSpPr>
@@ -9569,7 +12907,7 @@
       </p:sp>
       <p:pic>
         <p:nvPicPr>
-          <p:cNvPr id="5" name="Picture 4" descr="p54-sesija-u-toku.png"/>
+          <p:cNvPr id="5" name="Picture 4" descr="p54-sesija-u-toku-0.045-0.030-0.000.png"/>
           <p:cNvPicPr>
             <a:picLocks noChangeAspect="1"/>
           </p:cNvPicPr>
@@ -9699,7 +13037,7 @@
       </p:sp>
       <p:pic>
         <p:nvPicPr>
-          <p:cNvPr id="8" name="Picture 7" descr="p56-pauza-planirana.png"/>
+          <p:cNvPr id="8" name="Picture 7" descr="p56-pauza-planirana-0.045-0.030-0.000.png"/>
           <p:cNvPicPr>
             <a:picLocks noChangeAspect="1"/>
           </p:cNvPicPr>
@@ -9829,7 +13167,7 @@
       </p:sp>
       <p:pic>
         <p:nvPicPr>
-          <p:cNvPr id="11" name="Picture 10" descr="p54-prekoracenje.png"/>
+          <p:cNvPr id="11" name="Picture 10" descr="p54-prekoracenje-0.045-0.030-0.000.png"/>
           <p:cNvPicPr>
             <a:picLocks noChangeAspect="1"/>
           </p:cNvPicPr>
@@ -10726,7 +14064,31 @@
                 </a:solidFill>
                 <a:latin typeface="Arial"/>
               </a:rPr>
-              <a:t>Мерено се чува сирово, а не као оцена</a:t>
+              <a:t>Чувају се измерене вредности, а не закључци</a:t>
+            </a:r>
+          </a:p>
+          <a:p>
+            <a:pPr marL="533400" indent="-279400">
+              <a:lnSpc>
+                <a:spcPct val="105000"/>
+              </a:lnSpc>
+              <a:spcBef>
+                <a:spcPts val="500"/>
+              </a:spcBef>
+              <a:buClr>
+                <a:srgbClr val="48484A"/>
+              </a:buClr>
+              <a:buFont typeface="Arial"/>
+              <a:buChar char="–"/>
+            </a:pPr>
+            <a:r>
+              <a:rPr sz="1300" b="0">
+                <a:solidFill>
+                  <a:srgbClr val="8E8E93"/>
+                </a:solidFill>
+                <a:latin typeface="Arial"/>
+              </a:rPr>
+              <a:t>праг се може променити, а раније сесије остају упоредиве</a:t>
             </a:r>
           </a:p>
           <a:p>
@@ -10827,7 +14189,7 @@
       </p:sp>
       <p:pic>
         <p:nvPicPr>
-          <p:cNvPr id="7" name="Picture 6" descr="p55-rukovanje.png"/>
+          <p:cNvPr id="7" name="Picture 6" descr="p55-rukovanje-0.045-0.030-0.000.png"/>
           <p:cNvPicPr>
             <a:picLocks noChangeAspect="1"/>
           </p:cNvPicPr>
@@ -11128,7 +14490,7 @@
                 </a:solidFill>
                 <a:latin typeface="Arial"/>
               </a:rPr>
-              <a:t>Језички модел даје оцену, коментар и анализу</a:t>
+              <a:t>Језички модел Gemini 3.6 Flash</a:t>
             </a:r>
           </a:p>
           <a:p>
@@ -11271,7 +14633,7 @@
                 </a:solidFill>
                 <a:latin typeface="Arial"/>
               </a:rPr>
-              <a:t>без кључа, без мреже или при грешци — локално мерило</a:t>
+              <a:t>при грешци или без мреже — локално мерило</a:t>
             </a:r>
           </a:p>
           <a:p>
